--- a/산불논문_발표자료_수정본.pptx
+++ b/산불논문_발표자료_수정본.pptx
@@ -8,8 +8,9 @@
     <p:sldId id="256" r:id="rId2"/>
     <p:sldId id="277" r:id="rId28"/>
     <p:sldId id="278" r:id="rId29"/>
+    <p:sldId id="279" r:id="rId30"/>
     <p:sldId id="257" r:id="rId3"/>
-    <p:sldId id="279" r:id="rId30"/>
+    <p:sldId id="280" r:id="rId31"/>
     <p:sldId id="258" r:id="rId4"/>
     <p:sldId id="259" r:id="rId5"/>
     <p:sldId id="260" r:id="rId6"/>
@@ -19,12 +20,12 @@
     <p:sldId id="264" r:id="rId10"/>
     <p:sldId id="265" r:id="rId11"/>
     <p:sldId id="266" r:id="rId12"/>
-    <p:sldId id="280" r:id="rId31"/>
+    <p:sldId id="281" r:id="rId32"/>
     <p:sldId id="267" r:id="rId13"/>
     <p:sldId id="268" r:id="rId14"/>
-    <p:sldId id="281" r:id="rId32"/>
+    <p:sldId id="282" r:id="rId33"/>
     <p:sldId id="269" r:id="rId15"/>
-    <p:sldId id="282" r:id="rId33"/>
+    <p:sldId id="283" r:id="rId34"/>
     <p:sldId id="270" r:id="rId16"/>
     <p:sldId id="271" r:id="rId17"/>
     <p:sldId id="272" r:id="rId18"/>
@@ -151,7 +152,7 @@
               <c:strCache>
                 <c:ptCount val="1"/>
                 <c:pt idx="0">
-                  <c:v>건수</c:v>
+                  <c:v>발생</c:v>
                 </c:pt>
               </c:strCache>
             </c:strRef>
@@ -163,77 +164,35 @@
           </c:spPr>
           <c:cat>
             <c:strRef>
-              <c:f>Sheet1!$A$2:$A$11</c:f>
+              <c:f>Sheet1!$A$2:$A$4</c:f>
               <c:strCache>
-                <c:ptCount val="10"/>
+                <c:ptCount val="3"/>
                 <c:pt idx="0">
-                  <c:v>16</c:v>
+                  <c:v>경북</c:v>
                 </c:pt>
                 <c:pt idx="1">
-                  <c:v>17</c:v>
+                  <c:v>영서</c:v>
                 </c:pt>
                 <c:pt idx="2">
-                  <c:v>18</c:v>
-                </c:pt>
-                <c:pt idx="3">
-                  <c:v>19</c:v>
-                </c:pt>
-                <c:pt idx="4">
-                  <c:v>20</c:v>
-                </c:pt>
-                <c:pt idx="5">
-                  <c:v>21</c:v>
-                </c:pt>
-                <c:pt idx="6">
-                  <c:v>22</c:v>
-                </c:pt>
-                <c:pt idx="7">
-                  <c:v>23</c:v>
-                </c:pt>
-                <c:pt idx="8">
-                  <c:v>24</c:v>
-                </c:pt>
-                <c:pt idx="9">
-                  <c:v>25</c:v>
+                  <c:v>영동</c:v>
                 </c:pt>
               </c:strCache>
             </c:strRef>
           </c:cat>
           <c:val>
             <c:numRef>
-              <c:f>Sheet1!$B$2:$B$11</c:f>
+              <c:f>Sheet1!$B$2:$B$4</c:f>
               <c:numCache>
                 <c:formatCode>General</c:formatCode>
-                <c:ptCount val="10"/>
+                <c:ptCount val="3"/>
                 <c:pt idx="0">
-                  <c:v>391</c:v>
+                  <c:v>266</c:v>
                 </c:pt>
                 <c:pt idx="1">
-                  <c:v>692</c:v>
+                  <c:v>139</c:v>
                 </c:pt>
                 <c:pt idx="2">
-                  <c:v>496</c:v>
-                </c:pt>
-                <c:pt idx="3">
-                  <c:v>653</c:v>
-                </c:pt>
-                <c:pt idx="4">
-                  <c:v>620</c:v>
-                </c:pt>
-                <c:pt idx="5">
-                  <c:v>349</c:v>
-                </c:pt>
-                <c:pt idx="6">
-                  <c:v>756</c:v>
-                </c:pt>
-                <c:pt idx="7">
-                  <c:v>596</c:v>
-                </c:pt>
-                <c:pt idx="8">
-                  <c:v>279</c:v>
-                </c:pt>
-                <c:pt idx="9">
-                  <c:v>459</c:v>
+                  <c:v>66</c:v>
                 </c:pt>
               </c:numCache>
             </c:numRef>
@@ -246,7 +205,7 @@
             <a:lstStyle/>
             <a:p>
               <a:pPr>
-                <a:defRPr sz="900">
+                <a:defRPr sz="1100">
                   <a:solidFill>
                     <a:srgbClr val="1E2622"/>
                   </a:solidFill>
@@ -263,7 +222,7 @@
           <c:showBubbleSize val="0"/>
           <c:showLeaderLines val="1"/>
         </c:dLbls>
-        <c:gapWidth val="40"/>
+        <c:gapWidth val="50"/>
         <c:axId val="-2068027336"/>
         <c:axId val="-2113994440"/>
       </c:barChart>
@@ -289,7 +248,7 @@
           <a:lstStyle/>
           <a:p>
             <a:pPr>
-              <a:defRPr sz="900"/>
+              <a:defRPr sz="1100"/>
             </a:pPr>
           </a:p>
         </c:txPr>
@@ -319,7 +278,7 @@
     <a:lstStyle/>
     <a:p>
       <a:pPr>
-        <a:defRPr sz="900">
+        <a:defRPr sz="1100">
           <a:solidFill>
             <a:srgbClr val="5D6660"/>
           </a:solidFill>
@@ -364,15 +323,7 @@
             </a:solidFill>
           </c:spPr>
           <c:dPt>
-            <c:idx val="6"/>
-            <c:spPr>
-              <a:solidFill>
-                <a:srgbClr val="A8461A"/>
-              </a:solidFill>
-            </c:spPr>
-          </c:dPt>
-          <c:dPt>
-            <c:idx val="9"/>
+            <c:idx val="1"/>
             <c:spPr>
               <a:solidFill>
                 <a:srgbClr val="A8461A"/>
@@ -381,19 +332,19 @@
           </c:dPt>
           <c:dLbls>
             <c:dLbl>
-              <c:idx val="6"/>
+              <c:idx val="0"/>
               <c:tx>
                 <c:rich>
                   <a:bodyPr/>
                   <a:lstStyle/>
                   <a:p>
                     <a:r>
-                      <a:rPr sz="900">
+                      <a:rPr sz="1000" b="1">
                         <a:solidFill>
                           <a:srgbClr val="1E2622"/>
                         </a:solidFill>
                       </a:rPr>
-                      <a:t>24,797</a:t>
+                      <a:t>3,700~4,000</a:t>
                     </a:r>
                   </a:p>
                 </c:rich>
@@ -407,45 +358,19 @@
               <c:showBubbleSize val="0"/>
             </c:dLbl>
             <c:dLbl>
-              <c:idx val="7"/>
+              <c:idx val="1"/>
               <c:tx>
                 <c:rich>
                   <a:bodyPr/>
                   <a:lstStyle/>
                   <a:p>
                     <a:r>
-                      <a:rPr sz="900">
+                      <a:rPr sz="1000" b="1">
                         <a:solidFill>
                           <a:srgbClr val="1E2622"/>
                         </a:solidFill>
                       </a:rPr>
-                      <a:t>4,992</a:t>
-                    </a:r>
-                  </a:p>
-                </c:rich>
-              </c:tx>
-              <c:dLblPos val="outEnd"/>
-              <c:showLegendKey val="0"/>
-              <c:showVal val="1"/>
-              <c:showCatName val="0"/>
-              <c:showSerName val="0"/>
-              <c:showPercent val="0"/>
-              <c:showBubbleSize val="0"/>
-            </c:dLbl>
-            <c:dLbl>
-              <c:idx val="9"/>
-              <c:tx>
-                <c:rich>
-                  <a:bodyPr/>
-                  <a:lstStyle/>
-                  <a:p>
-                    <a:r>
-                      <a:rPr sz="900">
-                        <a:solidFill>
-                          <a:srgbClr val="1E2622"/>
-                        </a:solidFill>
-                      </a:rPr>
-                      <a:t>105,099</a:t>
+                      <a:t>약 104,000</a:t>
                     </a:r>
                   </a:p>
                 </c:rich>
@@ -468,83 +393,35 @@
           </c:dLbls>
           <c:cat>
             <c:strRef>
-              <c:f>Sheet1!$A$2:$A$11</c:f>
+              <c:f>Sheet1!$A$2:$A$3</c:f>
               <c:strCache>
-                <c:ptCount val="10"/>
+                <c:ptCount val="2"/>
                 <c:pt idx="0">
-                  <c:v>16</c:v>
+                  <c:v>연평균</c:v>
                 </c:pt>
                 <c:pt idx="1">
-                  <c:v>17</c:v>
-                </c:pt>
-                <c:pt idx="2">
-                  <c:v>18</c:v>
-                </c:pt>
-                <c:pt idx="3">
-                  <c:v>19</c:v>
-                </c:pt>
-                <c:pt idx="4">
-                  <c:v>20</c:v>
-                </c:pt>
-                <c:pt idx="5">
-                  <c:v>21</c:v>
-                </c:pt>
-                <c:pt idx="6">
-                  <c:v>22</c:v>
-                </c:pt>
-                <c:pt idx="7">
-                  <c:v>23</c:v>
-                </c:pt>
-                <c:pt idx="8">
-                  <c:v>24</c:v>
-                </c:pt>
-                <c:pt idx="9">
-                  <c:v>25</c:v>
+                  <c:v>2025년 3월</c:v>
                 </c:pt>
               </c:strCache>
             </c:strRef>
           </c:cat>
           <c:val>
             <c:numRef>
-              <c:f>Sheet1!$B$2:$B$11</c:f>
+              <c:f>Sheet1!$B$2:$B$3</c:f>
               <c:numCache>
                 <c:formatCode>General</c:formatCode>
-                <c:ptCount val="10"/>
+                <c:ptCount val="2"/>
                 <c:pt idx="0">
-                  <c:v>378</c:v>
+                  <c:v>3850</c:v>
                 </c:pt>
                 <c:pt idx="1">
-                  <c:v>1480</c:v>
-                </c:pt>
-                <c:pt idx="2">
-                  <c:v>894</c:v>
-                </c:pt>
-                <c:pt idx="3">
-                  <c:v>3255</c:v>
-                </c:pt>
-                <c:pt idx="4">
-                  <c:v>2920</c:v>
-                </c:pt>
-                <c:pt idx="5">
-                  <c:v>766</c:v>
-                </c:pt>
-                <c:pt idx="6">
-                  <c:v>24797</c:v>
-                </c:pt>
-                <c:pt idx="7">
-                  <c:v>4992</c:v>
-                </c:pt>
-                <c:pt idx="8">
-                  <c:v>132</c:v>
-                </c:pt>
-                <c:pt idx="9">
-                  <c:v>105099</c:v>
+                  <c:v>104000</c:v>
                 </c:pt>
               </c:numCache>
             </c:numRef>
           </c:val>
         </c:ser>
-        <c:gapWidth val="40"/>
+        <c:gapWidth val="30"/>
         <c:axId val="-2068027336"/>
         <c:axId val="-2113994440"/>
       </c:barChart>
@@ -570,7 +447,7 @@
           <a:lstStyle/>
           <a:p>
             <a:pPr>
-              <a:defRPr sz="900"/>
+              <a:defRPr sz="1100"/>
             </a:pPr>
           </a:p>
         </c:txPr>
@@ -600,7 +477,7 @@
     <a:lstStyle/>
     <a:p>
       <a:pPr>
-        <a:defRPr sz="900">
+        <a:defRPr sz="1100">
           <a:solidFill>
             <a:srgbClr val="5D6660"/>
           </a:solidFill>
@@ -634,7 +511,7 @@
               <c:strCache>
                 <c:ptCount val="1"/>
                 <c:pt idx="0">
-                  <c:v>1912–1940</c:v>
+                  <c:v>상승 속도</c:v>
                 </c:pt>
               </c:strCache>
             </c:strRef>
@@ -644,93 +521,60 @@
               <a:srgbClr val="8FA3B5"/>
             </a:solidFill>
           </c:spPr>
+          <c:dPt>
+            <c:idx val="2"/>
+            <c:spPr>
+              <a:solidFill>
+                <a:srgbClr val="A8461A"/>
+              </a:solidFill>
+            </c:spPr>
+          </c:dPt>
           <c:cat>
             <c:strRef>
-              <c:f>Sheet1!$A$2:$A$3</c:f>
+              <c:f>Sheet1!$A$2:$A$4</c:f>
               <c:strCache>
-                <c:ptCount val="2"/>
+                <c:ptCount val="3"/>
                 <c:pt idx="0">
-                  <c:v>여름</c:v>
+                  <c:v>1912–2024년
+(113년)</c:v>
                 </c:pt>
                 <c:pt idx="1">
-                  <c:v>겨울</c:v>
+                  <c:v>1973–2025년
+(전국 관측)</c:v>
+                </c:pt>
+                <c:pt idx="2">
+                  <c:v>최근 10년</c:v>
                 </c:pt>
               </c:strCache>
             </c:strRef>
           </c:cat>
           <c:val>
             <c:numRef>
-              <c:f>Sheet1!$B$2:$B$3</c:f>
+              <c:f>Sheet1!$B$2:$B$4</c:f>
               <c:numCache>
                 <c:formatCode>General</c:formatCode>
-                <c:ptCount val="2"/>
+                <c:ptCount val="3"/>
                 <c:pt idx="0">
-                  <c:v>98</c:v>
+                  <c:v>0.21</c:v>
                 </c:pt>
                 <c:pt idx="1">
-                  <c:v>109</c:v>
+                  <c:v>0.3</c:v>
                 </c:pt>
-              </c:numCache>
-            </c:numRef>
-          </c:val>
-        </c:ser>
-        <c:ser>
-          <c:idx val="1"/>
-          <c:order val="1"/>
-          <c:tx>
-            <c:strRef>
-              <c:f>Sheet1!$C$1</c:f>
-              <c:strCache>
-                <c:ptCount val="1"/>
-                <c:pt idx="0">
-                  <c:v>1991–2020</c:v>
-                </c:pt>
-              </c:strCache>
-            </c:strRef>
-          </c:tx>
-          <c:spPr>
-            <a:solidFill>
-              <a:srgbClr val="A8461A"/>
-            </a:solidFill>
-          </c:spPr>
-          <c:cat>
-            <c:strRef>
-              <c:f>Sheet1!$A$2:$A$3</c:f>
-              <c:strCache>
-                <c:ptCount val="2"/>
-                <c:pt idx="0">
-                  <c:v>여름</c:v>
-                </c:pt>
-                <c:pt idx="1">
-                  <c:v>겨울</c:v>
-                </c:pt>
-              </c:strCache>
-            </c:strRef>
-          </c:cat>
-          <c:val>
-            <c:numRef>
-              <c:f>Sheet1!$C$2:$C$3</c:f>
-              <c:numCache>
-                <c:formatCode>General</c:formatCode>
-                <c:ptCount val="2"/>
-                <c:pt idx="0">
-                  <c:v>123</c:v>
-                </c:pt>
-                <c:pt idx="1">
-                  <c:v>87</c:v>
+                <c:pt idx="2">
+                  <c:v>1.1</c:v>
                 </c:pt>
               </c:numCache>
             </c:numRef>
           </c:val>
         </c:ser>
         <c:dLbls>
-          <c:numFmt formatCode="0" sourceLinked="0"/>
+          <c:numFmt formatCode="+0.00" sourceLinked="0"/>
           <c:txPr>
             <a:bodyPr/>
             <a:lstStyle/>
             <a:p>
               <a:pPr>
-                <a:defRPr sz="1000">
+                <a:defRPr sz="1200">
                   <a:solidFill>
                     <a:srgbClr val="1E2622"/>
                   </a:solidFill>
@@ -747,7 +591,7 @@
           <c:showBubbleSize val="0"/>
           <c:showLeaderLines val="1"/>
         </c:dLbls>
-        <c:gapWidth val="60"/>
+        <c:gapWidth val="80"/>
         <c:axId val="-2068027336"/>
         <c:axId val="-2113994440"/>
       </c:barChart>
@@ -773,7 +617,7 @@
           <a:lstStyle/>
           <a:p>
             <a:pPr>
-              <a:defRPr sz="1000"/>
+              <a:defRPr sz="1200"/>
             </a:pPr>
           </a:p>
         </c:txPr>
@@ -796,19 +640,6 @@
         <c:crosses val="autoZero"/>
       </c:valAx>
     </c:plotArea>
-    <c:legend>
-      <c:legendPos val="b"/>
-      <c:overlay val="0"/>
-      <c:txPr>
-        <a:bodyPr/>
-        <a:lstStyle/>
-        <a:p>
-          <a:pPr>
-            <a:defRPr sz="1000"/>
-          </a:pPr>
-        </a:p>
-      </c:txPr>
-    </c:legend>
     <c:dispBlanksAs val="gap"/>
   </c:chart>
   <c:txPr>
@@ -816,7 +647,7 @@
     <a:lstStyle/>
     <a:p>
       <a:pPr>
-        <a:defRPr sz="1000">
+        <a:defRPr sz="1200">
           <a:solidFill>
             <a:srgbClr val="5D6660"/>
           </a:solidFill>
@@ -2528,7 +2359,7 @@
           <a:lstStyle/>
           <a:p>
             <a:r>
-              <a:t>[약 2분] 논문 본론에 들어가기 전에 최근 동향을 짚는다. 왼쪽, 2016년 이후 산불 발생 건수는 연 300~700건 사이에서 오르내릴 뿐 뚜렷한 증가 추세는 아니다. 그러나 가운데 피해면적을 보면 2022년 울진·강릉·동해, 2025년 영남 대형산불에서 한 해 피해가 폭발적으로 커진다. 즉 건수가 아니라 대형화가 문제다. 오른쪽은 기후 배경이다. 한국의 연평균기온은 1910년대 12.0도에서 2010년대 13.9도로 1.9도 올랐고, 여름은 98일에서 123일로 길어지고 겨울은 109일에서 87일로 짧아졌다. 연강수일수는 10년마다 약 0.68일씩 줄었다. 따뜻하고 건조한 봄과 겨울이 늘면서 대형산불의 기상 조건이 갖춰지고 있다. [확인 필요: 수치는 산림청·기상청 공표 자료로 최종 검증 후 사용]</a:t>
+              <a:t>[약 1분 30초] 논문에 정리된 국내 산불 현황이다. 우리나라는 연평균 450~500건의 산불이 발생해 3,700~4,000ha가 소실된다. 그런데 2025년 3월 영남 대형산불 한 번의 피해면적이 약 10만 4천 ha로, 연평균 피해의 26배를 넘는다. 가운데 그림 오른쪽 막대가 그 차이다(연평균은 범위의 중간값으로 표시). 왼쪽은 이 연구의 대상인 강원·경북에서 2022년 1월~2025년 8월 사이 정리된 발생 격자 471건의 권역별 분포로, 경북이 266건으로 가장 많다. 오른쪽은 선행연구가 보고한 최근 경향이다: 1991~2020년 연간 산불이 늘고 있고, 대형산불은 강원·경북 북동부에 집중되며, 산불 시기는 봄에서 5월과 겨울로 넓어지고, 주말 등산이 늘면서 주말 산불이 늘었다. 농촌 인구의 감소와 고령화로 초동 진화도 어려워지고 있다. [출처: Youn et al. 2026, 서론 및 3.1절]</a:t>
             </a:r>
           </a:p>
         </p:txBody>
@@ -2598,7 +2429,7 @@
           <a:lstStyle/>
           <a:p>
             <a:r>
-              <a:t>[약 1분] 숫자 뒤에는 이런 현장이 있다. 산불이 능선을 타고 번지는 모습, 불이 지나간 뒤 검게 탄 숲, 그리고 삶의 터전을 잃은 주민들이다. 산불은 숲만의 문제가 아니라 사람의 삶의 문제다. [사진 삽입: 산불 확산 / 산불 피해지 / 피해 주민]</a:t>
+              <a:t>[약 1분 30초] 기후 배경이다. 기상청의 113년 분석에 따르면 우리나라 연평균기온은 1912~2024년에 10년마다 0.21도씩 올랐다. 그런데 관측망이 전국으로 확대된 1973년 이후로 보면 10년당 0.30도, 최근 10년만 보면 10년당 1.10도로 상승이 가속되고 있다(왼쪽 그래프). 2024년 전국 평균기온은 14.5도로 직전 30년 평균 12.5도보다 2도 높아 1973년 관측 이후 가장 높았다. 계절별로는 봄, 특히 3월의 상승 폭이 가장 크다. 연강수일수도 10년마다 약 0.7일씩 줄었다. 산불이 집중되는 봄이 가장 빠르게 따뜻해지고 건조해지고 있다는 점이 중요하다. [확인 필요: 수치는 기상청 보고서 원문과 대조 후 사용]</a:t>
             </a:r>
           </a:p>
         </p:txBody>
@@ -2668,7 +2499,7 @@
           <a:lstStyle/>
           <a:p>
             <a:r>
-              <a:t>[약 1분 30초] 가설 1로 들어가기 전에 두 숲의 모습을 비교한다. 왼쪽은 전후 녹화로 조성된 침엽수 인공림으로, 같은 나이의 나무가 빽빽하게 서 있고 연료가 연속된다. 오른쪽은 활엽수 천연림으로, 다층 구조와 낙엽층이 습도를 유지한다. 이 차이가 이어지는 결과의 핵심이다. [사진 삽입: 침엽수 인공림 / 활엽수 천연림]</a:t>
+              <a:t>[약 1분] 숫자 뒤에는 이런 현장이 있다. 산불이 능선을 타고 번지는 모습, 불이 지나간 뒤 검게 탄 숲, 그리고 삶의 터전을 잃은 주민들이다. 산불은 숲만의 문제가 아니라 사람의 삶의 문제다. [사진 삽입: 산불 확산 / 산불 피해지 / 피해 주민]</a:t>
             </a:r>
           </a:p>
         </p:txBody>
@@ -2738,7 +2569,7 @@
           <a:lstStyle/>
           <a:p>
             <a:r>
-              <a:t>[약 1분] 가설 2의 배경이 되는 현장이다. 어린 나무가 베어지는 산림바이오매스 생산 벌채 현장이다. 숲가꾸기 행위가 산불을 키운다는 논쟁이 있으나 이번 분석에서는 유의한 관계가 확인되지 않았다. 다만 부산물 연료 효과 등은 추가 연구가 필요하다. [사진 삽입: 산림바이오매스 생산 벌채 현장]</a:t>
+              <a:t>[약 1분 30초] 가설 1로 들어가기 전에 두 숲의 모습을 비교한다. 왼쪽은 전후 녹화로 조성된 침엽수 인공림으로, 같은 나이의 나무가 빽빽하게 서 있고 연료가 연속된다. 오른쪽은 활엽수 천연림으로, 다층 구조와 낙엽층이 습도를 유지한다. 이 차이가 이어지는 결과의 핵심이다. [사진 삽입: 침엽수 인공림 / 활엽수 천연림]</a:t>
             </a:r>
           </a:p>
         </p:txBody>
@@ -2764,6 +2595,76 @@
 </file>
 
 <file path=ppt/notesSlides/notesSlide27.xml><?xml version="1.0" encoding="utf-8"?>
+<p:notes xmlns:a="http://schemas.openxmlformats.org/drawingml/2006/main" xmlns:p="http://schemas.openxmlformats.org/presentationml/2006/main" xmlns:r="http://schemas.openxmlformats.org/officeDocument/2006/relationships">
+  <p:cSld>
+    <p:spTree>
+      <p:nvGrpSpPr>
+        <p:cNvPr id="1" name=""/>
+        <p:cNvGrpSpPr/>
+        <p:nvPr/>
+      </p:nvGrpSpPr>
+      <p:grpSpPr>
+        <a:xfrm>
+          <a:off x="0" y="0"/>
+          <a:ext cx="0" cy="0"/>
+          <a:chOff x="0" y="0"/>
+          <a:chExt cx="0" cy="0"/>
+        </a:xfrm>
+      </p:grpSpPr>
+      <p:sp>
+        <p:nvSpPr>
+          <p:cNvPr id="2" name="Slide Image Placeholder 1"/>
+          <p:cNvSpPr>
+            <a:spLocks noGrp="1"/>
+          </p:cNvSpPr>
+          <p:nvPr>
+            <p:ph type="sldImg" idx="2"/>
+          </p:nvPr>
+        </p:nvSpPr>
+        <p:spPr/>
+      </p:sp>
+      <p:sp>
+        <p:nvSpPr>
+          <p:cNvPr id="3" name="Notes Placeholder 2"/>
+          <p:cNvSpPr>
+            <a:spLocks noGrp="1"/>
+          </p:cNvSpPr>
+          <p:nvPr>
+            <p:ph type="body" idx="3" sz="quarter"/>
+          </p:nvPr>
+        </p:nvSpPr>
+        <p:spPr/>
+        <p:txBody>
+          <a:bodyPr/>
+          <a:lstStyle/>
+          <a:p>
+            <a:r>
+              <a:t>[약 1분] 가설 2의 배경이 되는 현장이다. 어린 나무가 베어지는 산림바이오매스 생산 벌채 현장이다. 숲가꾸기 행위가 산불을 키운다는 논쟁이 있으나 이번 분석에서는 유의한 관계가 확인되지 않았다. 다만 부산물 연료 효과 등은 추가 연구가 필요하다. [사진 삽입: 산림바이오매스 생산 벌채 현장]</a:t>
+            </a:r>
+          </a:p>
+        </p:txBody>
+      </p:sp>
+      <p:sp>
+        <p:nvSpPr>
+          <p:cNvPr id="4" name="Slide Number Placeholder 3"/>
+          <p:cNvSpPr>
+            <a:spLocks noGrp="1"/>
+          </p:cNvSpPr>
+          <p:nvPr>
+            <p:ph type="sldNum" idx="5" sz="quarter"/>
+          </p:nvPr>
+        </p:nvSpPr>
+        <p:spPr/>
+      </p:sp>
+    </p:spTree>
+  </p:cSld>
+  <p:clrMapOvr>
+    <a:masterClrMapping/>
+  </p:clrMapOvr>
+</p:notes>
+</file>
+
+<file path=ppt/notesSlides/notesSlide28.xml><?xml version="1.0" encoding="utf-8"?>
 <p:notes xmlns:a="http://schemas.openxmlformats.org/drawingml/2006/main" xmlns:p="http://schemas.openxmlformats.org/presentationml/2006/main" xmlns:r="http://schemas.openxmlformats.org/officeDocument/2006/relationships">
   <p:cSld>
     <p:spTree>
@@ -4834,7 +4735,7 @@
                 <a:ea typeface="Noto Sans KR" pitchFamily="34" charset="-122"/>
                 <a:cs typeface="Noto Sans KR" pitchFamily="34" charset="-120"/>
               </a:rPr>
-              <a:t>13</a:t>
+              <a:t>14</a:t>
             </a:r>
             <a:endParaRPr lang="en-US" sz="1200" dirty="0"/>
           </a:p>
@@ -5089,7 +4990,7 @@
                 <a:ea typeface="Noto Sans KR" pitchFamily="34" charset="-122"/>
                 <a:cs typeface="Noto Sans KR" pitchFamily="34" charset="-120"/>
               </a:rPr>
-              <a:t>14</a:t>
+              <a:t>15</a:t>
             </a:r>
             <a:endParaRPr lang="en-US" sz="1200" dirty="0"/>
           </a:p>
@@ -5779,7 +5680,7 @@
                 <a:ea typeface="Noto Sans KR" pitchFamily="34" charset="-122"/>
                 <a:cs typeface="Noto Sans KR" pitchFamily="34" charset="-120"/>
               </a:rPr>
-              <a:t>16</a:t>
+              <a:t>17</a:t>
             </a:r>
             <a:endParaRPr lang="en-US" sz="1200" dirty="0"/>
           </a:p>
@@ -6391,7 +6292,7 @@
                 <a:ea typeface="Noto Sans KR" pitchFamily="34" charset="-122"/>
                 <a:cs typeface="Noto Sans KR" pitchFamily="34" charset="-120"/>
               </a:rPr>
-              <a:t>17</a:t>
+              <a:t>18</a:t>
             </a:r>
             <a:endParaRPr lang="en-US" sz="1200" dirty="0"/>
           </a:p>
@@ -6986,7 +6887,7 @@
                 <a:ea typeface="Noto Sans KR" pitchFamily="34" charset="-122"/>
                 <a:cs typeface="Noto Sans KR" pitchFamily="34" charset="-120"/>
               </a:rPr>
-              <a:t>19</a:t>
+              <a:t>20</a:t>
             </a:r>
             <a:endParaRPr lang="en-US" sz="1200" dirty="0"/>
           </a:p>
@@ -7676,7 +7577,7 @@
                 <a:ea typeface="Noto Sans KR" pitchFamily="34" charset="-122"/>
                 <a:cs typeface="Noto Sans KR" pitchFamily="34" charset="-120"/>
               </a:rPr>
-              <a:t>21</a:t>
+              <a:t>22</a:t>
             </a:r>
             <a:endParaRPr lang="en-US" sz="1200" dirty="0"/>
           </a:p>
@@ -8195,7 +8096,7 @@
                 <a:ea typeface="Noto Sans KR" pitchFamily="34" charset="-122"/>
                 <a:cs typeface="Noto Sans KR" pitchFamily="34" charset="-120"/>
               </a:rPr>
-              <a:t>22</a:t>
+              <a:t>23</a:t>
             </a:r>
             <a:endParaRPr lang="en-US" sz="1200" dirty="0"/>
           </a:p>
@@ -8850,7 +8751,7 @@
                 <a:ea typeface="Noto Sans KR" pitchFamily="34" charset="-122"/>
                 <a:cs typeface="Noto Sans KR" pitchFamily="34" charset="-120"/>
               </a:rPr>
-              <a:t>23</a:t>
+              <a:t>24</a:t>
             </a:r>
             <a:endParaRPr lang="en-US" sz="1200" dirty="0"/>
           </a:p>
@@ -9439,7 +9340,7 @@
                 <a:ea typeface="Noto Sans KR" pitchFamily="34" charset="-122"/>
                 <a:cs typeface="Noto Sans KR" pitchFamily="34" charset="-120"/>
               </a:rPr>
-              <a:t>24</a:t>
+              <a:t>25</a:t>
             </a:r>
             <a:endParaRPr lang="en-US" sz="1200" dirty="0"/>
           </a:p>
@@ -10136,7 +10037,7 @@
                 <a:ea typeface="Noto Sans KR" pitchFamily="34" charset="-122"/>
                 <a:cs typeface="Noto Sans KR" pitchFamily="34" charset="-120"/>
               </a:rPr>
-              <a:t>25</a:t>
+              <a:t>26</a:t>
             </a:r>
             <a:endParaRPr lang="en-US" sz="1200" dirty="0"/>
           </a:p>
@@ -10923,7 +10824,7 @@
                 <a:ea typeface="Noto Sans KR" pitchFamily="34" charset="-122"/>
                 <a:cs typeface="Noto Sans KR" pitchFamily="34" charset="-120"/>
               </a:rPr>
-              <a:t>4</a:t>
+              <a:t>5</a:t>
             </a:r>
             <a:endParaRPr lang="en-US" sz="1200" dirty="0"/>
           </a:p>
@@ -12157,7 +12058,7 @@
                 <a:ea typeface="Noto Sans KR" pitchFamily="34" charset="-122"/>
                 <a:cs typeface="Noto Sans KR" pitchFamily="34" charset="-120"/>
               </a:rPr>
-              <a:t>26</a:t>
+              <a:t>27</a:t>
             </a:r>
             <a:endParaRPr lang="en-US" sz="1200" dirty="0"/>
           </a:p>
@@ -13246,7 +13147,7 @@
                 <a:ea typeface="Noto Sans KR" pitchFamily="34" charset="-122"/>
                 <a:cs typeface="Noto Sans KR" pitchFamily="34" charset="-120"/>
               </a:rPr>
-              <a:t>최근 동향</a:t>
+              <a:t>최근 동향 ① 산불 발생현황</a:t>
             </a:r>
             <a:endParaRPr lang="en-US" sz="1300" dirty="0"/>
           </a:p>
@@ -13292,7 +13193,7 @@
                 <a:ea typeface="Noto Serif KR" pitchFamily="18" charset="-122"/>
                 <a:cs typeface="Noto Serif KR" pitchFamily="18" charset="-120"/>
               </a:rPr>
-              <a:t>산불은 커지고, 기후는 건조해지고 있다</a:t>
+              <a:t>우리나라 산불은 대형화·일상화되고 있다</a:t>
             </a:r>
             <a:endParaRPr lang="en-US" sz="3000" dirty="0"/>
           </a:p>
@@ -13336,7 +13237,29 @@
                 <a:ea typeface="Noto Sans KR" pitchFamily="34" charset="-122"/>
                 <a:cs typeface="Noto Sans KR" pitchFamily="34" charset="-120"/>
               </a:rPr>
-              <a:t>자료: 산림청 산불통계 · 기상청 한국 기후변화 평가 · 2025년 피해면적은 산림청 집계 기준</a:t>
+              <a:t>Youn et al. (2026) · </a:t>
+            </a:r>
+            <a:r>
+              <a:rPr lang="en-US" sz="1200" i="1" dirty="0">
+                <a:solidFill>
+                  <a:srgbClr val="5D6660"/>
+                </a:solidFill>
+                <a:latin typeface="Noto Sans KR" pitchFamily="34" charset="0"/>
+                <a:ea typeface="Noto Sans KR" pitchFamily="34" charset="-122"/>
+                <a:cs typeface="Noto Sans KR" pitchFamily="34" charset="-120"/>
+              </a:rPr>
+              <a:t>Fire</a:t>
+            </a:r>
+            <a:r>
+              <a:rPr lang="en-US" sz="1200" dirty="0">
+                <a:solidFill>
+                  <a:srgbClr val="5D6660"/>
+                </a:solidFill>
+                <a:latin typeface="Noto Sans KR" pitchFamily="34" charset="0"/>
+                <a:ea typeface="Noto Sans KR" pitchFamily="34" charset="-122"/>
+                <a:cs typeface="Noto Sans KR" pitchFamily="34" charset="-120"/>
+              </a:rPr>
+              <a:t> 9(6): 246</a:t>
             </a:r>
             <a:endParaRPr lang="en-US" sz="1200" dirty="0"/>
           </a:p>
@@ -13562,7 +13485,7 @@
                 <a:ea typeface="Noto Sans KR"/>
                 <a:cs typeface="Noto Sans KR"/>
               </a:rPr>
-              <a:t>산불 발생 건수</a:t>
+              <a:t>연구지역 산불 발생</a:t>
             </a:r>
           </a:p>
         </p:txBody>
@@ -13599,7 +13522,7 @@
                 <a:ea typeface="Noto Sans KR"/>
                 <a:cs typeface="Noto Sans KR"/>
               </a:rPr>
-              <a:t>연도별, 건</a:t>
+              <a:t>강원·경북 · 2022.1–2025.8 · n = 471건</a:t>
             </a:r>
           </a:p>
         </p:txBody>
@@ -13614,7 +13537,7 @@
         </p:nvGraphicFramePr>
         <p:xfrm>
           <a:off x="905256" y="2560320"/>
-          <a:ext cx="3200400" cy="2651760"/>
+          <a:ext cx="3200400" cy="2697480"/>
         </p:xfrm>
         <a:graphic>
           <a:graphicData uri="http://schemas.openxmlformats.org/drawingml/2006/chart">
@@ -13654,7 +13577,7 @@
                 <a:ea typeface="Noto Sans KR"/>
                 <a:cs typeface="Noto Sans KR"/>
               </a:rPr>
-              <a:t>산불 피해면적</a:t>
+              <a:t>피해면적 비교</a:t>
             </a:r>
           </a:p>
         </p:txBody>
@@ -13691,7 +13614,7 @@
                 <a:ea typeface="Noto Sans KR"/>
                 <a:cs typeface="Noto Sans KR"/>
               </a:rPr>
-              <a:t>연도별, ha · 2025년 영남 대형산불</a:t>
+              <a:t>ha · 연평균은 범위의 중간값으로 표시</a:t>
             </a:r>
           </a:p>
         </p:txBody>
@@ -13706,7 +13629,7 @@
         </p:nvGraphicFramePr>
         <p:xfrm>
           <a:off x="4498848" y="2560320"/>
-          <a:ext cx="3200400" cy="2651760"/>
+          <a:ext cx="3200400" cy="2697480"/>
         </p:xfrm>
         <a:graphic>
           <a:graphicData uri="http://schemas.openxmlformats.org/drawingml/2006/chart">
@@ -13746,7 +13669,7 @@
                 <a:ea typeface="Noto Sans KR"/>
                 <a:cs typeface="Noto Sans KR"/>
               </a:rPr>
-              <a:t>기후 배경: 계절 길이</a:t>
+              <a:t>최근 경향</a:t>
             </a:r>
           </a:p>
         </p:txBody>
@@ -13759,8 +13682,8 @@
         </p:nvSpPr>
         <p:spPr>
           <a:xfrm>
-            <a:off x="8220456" y="2258568"/>
-            <a:ext cx="2926080" cy="228600"/>
+            <a:off x="8220456" y="2423160"/>
+            <a:ext cx="2926080" cy="2834640"/>
           </a:xfrm>
           <a:prstGeom prst="rect">
             <a:avLst/>
@@ -13775,81 +13698,26 @@
           <a:p>
             <a:pPr algn="l"/>
             <a:r>
-              <a:rPr sz="1100" b="0" i="0">
-                <a:solidFill>
-                  <a:srgbClr val="5D6660"/>
+              <a:rPr sz="1400" b="1" i="0">
+                <a:solidFill>
+                  <a:srgbClr val="A8461A"/>
                 </a:solidFill>
                 <a:latin typeface="Noto Sans KR"/>
                 <a:ea typeface="Noto Sans KR"/>
                 <a:cs typeface="Noto Sans KR"/>
               </a:rPr>
-              <a:t>일 · 1912–40년 vs 1991–2020년</a:t>
-            </a:r>
-          </a:p>
-        </p:txBody>
-      </p:sp>
-      <p:graphicFrame>
-        <p:nvGraphicFramePr>
-          <p:cNvPr id="30" name="Chart 29"/>
-          <p:cNvGraphicFramePr>
-            <a:graphicFrameLocks noGrp="1"/>
-          </p:cNvGraphicFramePr>
-          <p:nvPr/>
-        </p:nvGraphicFramePr>
-        <p:xfrm>
-          <a:off x="8083296" y="2560320"/>
-          <a:ext cx="3200400" cy="1783080"/>
-        </p:xfrm>
-        <a:graphic>
-          <a:graphicData uri="http://schemas.openxmlformats.org/drawingml/2006/chart">
-            <c:chart xmlns:c="http://schemas.openxmlformats.org/drawingml/2006/chart" r:id="rId5"/>
-          </a:graphicData>
-        </a:graphic>
-      </p:graphicFrame>
-      <p:sp>
-        <p:nvSpPr>
-          <p:cNvPr id="31" name="TextBox 30"/>
-          <p:cNvSpPr txBox="1"/>
-          <p:nvPr/>
-        </p:nvSpPr>
-        <p:spPr>
-          <a:xfrm>
-            <a:off x="8220456" y="4480560"/>
-            <a:ext cx="2926080" cy="822960"/>
-          </a:xfrm>
-          <a:prstGeom prst="rect">
-            <a:avLst/>
-          </a:prstGeom>
-          <a:noFill/>
-        </p:spPr>
-        <p:txBody>
-          <a:bodyPr wrap="square" lIns="0" rIns="0" tIns="0" bIns="0" anchor="t">
-            <a:spAutoFit/>
-          </a:bodyPr>
-          <a:lstStyle/>
-          <a:p>
-            <a:pPr algn="l"/>
-            <a:r>
-              <a:rPr sz="2400" b="1" i="0">
-                <a:solidFill>
-                  <a:srgbClr val="A8461A"/>
-                </a:solidFill>
-                <a:latin typeface="Noto Serif KR"/>
-                <a:ea typeface="Noto Serif KR"/>
-                <a:cs typeface="Noto Serif KR"/>
-              </a:rPr>
-              <a:t>+1.9℃</a:t>
-            </a:r>
-            <a:r>
-              <a:rPr sz="1200" b="0" i="0">
-                <a:solidFill>
-                  <a:srgbClr val="5D6660"/>
+              <a:t>연 450~500건</a:t>
+            </a:r>
+            <a:r>
+              <a:rPr sz="1300" b="0" i="0">
+                <a:solidFill>
+                  <a:srgbClr val="1E2622"/>
                 </a:solidFill>
                 <a:latin typeface="Noto Sans KR"/>
                 <a:ea typeface="Noto Sans KR"/>
                 <a:cs typeface="Noto Sans KR"/>
               </a:rPr>
-              <a:t>  연평균기온</a:t>
+              <a:t> 발생, 3,700~4,000 ha 소실</a:t>
             </a:r>
           </a:p>
           <a:p>
@@ -13859,44 +13727,25 @@
               </a:spcBef>
             </a:pPr>
             <a:r>
-              <a:rPr sz="1100" b="0" i="0">
-                <a:solidFill>
-                  <a:srgbClr val="5D6660"/>
+              <a:rPr sz="1300" b="0" i="0">
+                <a:solidFill>
+                  <a:srgbClr val="1E2622"/>
                 </a:solidFill>
                 <a:latin typeface="Noto Sans KR"/>
                 <a:ea typeface="Noto Sans KR"/>
                 <a:cs typeface="Noto Sans KR"/>
               </a:rPr>
-              <a:t>1910년대 12.0℃ → 2010년대 13.9℃ · 연강수일수는 10년당 0.68일 감소</a:t>
-            </a:r>
-          </a:p>
-        </p:txBody>
-      </p:sp>
-      <p:sp>
-        <p:nvSpPr>
-          <p:cNvPr id="32" name="TextBox 31"/>
-          <p:cNvSpPr txBox="1"/>
-          <p:nvPr/>
-        </p:nvSpPr>
-        <p:spPr>
-          <a:xfrm>
-            <a:off x="813816" y="5577840"/>
-            <a:ext cx="10881360" cy="457200"/>
-          </a:xfrm>
-          <a:prstGeom prst="rect">
-            <a:avLst/>
-          </a:prstGeom>
-          <a:noFill/>
-        </p:spPr>
-        <p:txBody>
-          <a:bodyPr wrap="square" lIns="0" rIns="0" tIns="0" bIns="0" anchor="t">
-            <a:spAutoFit/>
-          </a:bodyPr>
-          <a:lstStyle/>
-          <a:p>
-            <a:pPr algn="l"/>
-            <a:r>
-              <a:rPr sz="1600" b="0" i="0">
+              <a:t>1991–2020년 연간 산불 증가, 대형산불은 강원·경북 북동부에 집중</a:t>
+            </a:r>
+          </a:p>
+          <a:p>
+            <a:pPr algn="l">
+              <a:spcBef>
+                <a:spcPts val="600"/>
+              </a:spcBef>
+            </a:pPr>
+            <a:r>
+              <a:rPr sz="1300" b="0" i="0">
                 <a:solidFill>
                   <a:srgbClr val="1E2622"/>
                 </a:solidFill>
@@ -13904,10 +13753,10 @@
                 <a:ea typeface="Noto Sans KR"/>
                 <a:cs typeface="Noto Sans KR"/>
               </a:rPr>
-              <a:t>발생 </a:t>
-            </a:r>
-            <a:r>
-              <a:rPr sz="1600" b="1" i="0">
+              <a:t>산불 시기가 봄에서 </a:t>
+            </a:r>
+            <a:r>
+              <a:rPr sz="1300" b="1" i="0">
                 <a:solidFill>
                   <a:srgbClr val="1E2622"/>
                 </a:solidFill>
@@ -13915,10 +13764,10 @@
                 <a:ea typeface="Noto Sans KR"/>
                 <a:cs typeface="Noto Sans KR"/>
               </a:rPr>
-              <a:t>건수</a:t>
-            </a:r>
-            <a:r>
-              <a:rPr sz="1600" b="0" i="0">
+              <a:t>5월과 겨울</a:t>
+            </a:r>
+            <a:r>
+              <a:rPr sz="1300" b="0" i="0">
                 <a:solidFill>
                   <a:srgbClr val="1E2622"/>
                 </a:solidFill>
@@ -13926,10 +13775,17 @@
                 <a:ea typeface="Noto Sans KR"/>
                 <a:cs typeface="Noto Sans KR"/>
               </a:rPr>
-              <a:t>는 큰 변화가 없지만 </a:t>
-            </a:r>
-            <a:r>
-              <a:rPr sz="1600" b="1" i="0">
+              <a:t>로 확대</a:t>
+            </a:r>
+          </a:p>
+          <a:p>
+            <a:pPr algn="l">
+              <a:spcBef>
+                <a:spcPts val="600"/>
+              </a:spcBef>
+            </a:pPr>
+            <a:r>
+              <a:rPr sz="1300" b="0" i="0">
                 <a:solidFill>
                   <a:srgbClr val="1E2622"/>
                 </a:solidFill>
@@ -13937,8 +13793,34 @@
                 <a:ea typeface="Noto Sans KR"/>
                 <a:cs typeface="Noto Sans KR"/>
               </a:rPr>
-              <a:t>피해는 대형화</a:t>
-            </a:r>
+              <a:t>주말 등산 증가로 주말 산불 증가, 농촌 고령화로 초동진화 어려움</a:t>
+            </a:r>
+          </a:p>
+        </p:txBody>
+      </p:sp>
+      <p:sp>
+        <p:nvSpPr>
+          <p:cNvPr id="30" name="TextBox 29"/>
+          <p:cNvSpPr txBox="1"/>
+          <p:nvPr/>
+        </p:nvSpPr>
+        <p:spPr>
+          <a:xfrm>
+            <a:off x="813816" y="5577840"/>
+            <a:ext cx="10881360" cy="457200"/>
+          </a:xfrm>
+          <a:prstGeom prst="rect">
+            <a:avLst/>
+          </a:prstGeom>
+          <a:noFill/>
+        </p:spPr>
+        <p:txBody>
+          <a:bodyPr wrap="square" lIns="0" rIns="0" tIns="0" bIns="0" anchor="t">
+            <a:spAutoFit/>
+          </a:bodyPr>
+          <a:lstStyle/>
+          <a:p>
+            <a:pPr algn="l"/>
             <a:r>
               <a:rPr sz="1600" b="0" i="0">
                 <a:solidFill>
@@ -13948,7 +13830,29 @@
                 <a:ea typeface="Noto Sans KR"/>
                 <a:cs typeface="Noto Sans KR"/>
               </a:rPr>
-              <a:t>되고 있다 — 기후가 그 배경이다.</a:t>
+              <a:t>2025년 한 번의 대형산불이 </a:t>
+            </a:r>
+            <a:r>
+              <a:rPr sz="1600" b="1" i="0">
+                <a:solidFill>
+                  <a:srgbClr val="1E2622"/>
+                </a:solidFill>
+                <a:latin typeface="Noto Sans KR"/>
+                <a:ea typeface="Noto Sans KR"/>
+                <a:cs typeface="Noto Sans KR"/>
+              </a:rPr>
+              <a:t>연평균 피해의 26배 이상</a:t>
+            </a:r>
+            <a:r>
+              <a:rPr sz="1600" b="0" i="0">
+                <a:solidFill>
+                  <a:srgbClr val="1E2622"/>
+                </a:solidFill>
+                <a:latin typeface="Noto Sans KR"/>
+                <a:ea typeface="Noto Sans KR"/>
+                <a:cs typeface="Noto Sans KR"/>
+              </a:rPr>
+              <a:t>을 남겼다.</a:t>
             </a:r>
           </a:p>
         </p:txBody>
@@ -14016,7 +13920,7 @@
                 <a:ea typeface="Noto Sans KR" pitchFamily="34" charset="-122"/>
                 <a:cs typeface="Noto Sans KR" pitchFamily="34" charset="-120"/>
               </a:rPr>
-              <a:t>현장 사진</a:t>
+              <a:t>최근 동향 ② 기후 변화 추이</a:t>
             </a:r>
             <a:endParaRPr lang="en-US" sz="1300" dirty="0"/>
           </a:p>
@@ -14062,7 +13966,7 @@
                 <a:ea typeface="Noto Serif KR" pitchFamily="18" charset="-122"/>
                 <a:cs typeface="Noto Serif KR" pitchFamily="18" charset="-120"/>
               </a:rPr>
-              <a:t>산불이 지나간 자리</a:t>
+              <a:t>기온은 오르고 가속되며, 봄이 가장 크게 올랐다</a:t>
             </a:r>
             <a:endParaRPr lang="en-US" sz="3000" dirty="0"/>
           </a:p>
@@ -14106,29 +14010,7 @@
                 <a:ea typeface="Noto Sans KR" pitchFamily="34" charset="-122"/>
                 <a:cs typeface="Noto Sans KR" pitchFamily="34" charset="-120"/>
               </a:rPr>
-              <a:t>Youn et al. (2026) · </a:t>
-            </a:r>
-            <a:r>
-              <a:rPr lang="en-US" sz="1200" i="1" dirty="0">
-                <a:solidFill>
-                  <a:srgbClr val="5D6660"/>
-                </a:solidFill>
-                <a:latin typeface="Noto Sans KR" pitchFamily="34" charset="0"/>
-                <a:ea typeface="Noto Sans KR" pitchFamily="34" charset="-122"/>
-                <a:cs typeface="Noto Sans KR" pitchFamily="34" charset="-120"/>
-              </a:rPr>
-              <a:t>Fire</a:t>
-            </a:r>
-            <a:r>
-              <a:rPr lang="en-US" sz="1200" dirty="0">
-                <a:solidFill>
-                  <a:srgbClr val="5D6660"/>
-                </a:solidFill>
-                <a:latin typeface="Noto Sans KR" pitchFamily="34" charset="0"/>
-                <a:ea typeface="Noto Sans KR" pitchFamily="34" charset="-122"/>
-                <a:cs typeface="Noto Sans KR" pitchFamily="34" charset="-120"/>
-              </a:rPr>
-              <a:t> 9(6): 246</a:t>
+              <a:t>자료: 기상청 「우리나라 113년 기후변화 분석 보고서」(2025), 「2024년 연 기후특성」</a:t>
             </a:r>
             <a:endParaRPr lang="en-US" sz="1200" dirty="0"/>
           </a:p>
@@ -14172,7 +14054,7 @@
                 <a:ea typeface="Noto Sans KR" pitchFamily="34" charset="-122"/>
                 <a:cs typeface="Noto Sans KR" pitchFamily="34" charset="-120"/>
               </a:rPr>
-              <a:t>5</a:t>
+              <a:t>4</a:t>
             </a:r>
             <a:endParaRPr lang="en-US" sz="1200" dirty="0"/>
           </a:p>
@@ -14187,7 +14069,7 @@
         <p:spPr>
           <a:xfrm>
             <a:off x="813816" y="1783080"/>
-            <a:ext cx="3383280" cy="3291840"/>
+            <a:ext cx="6675120" cy="3611880"/>
           </a:xfrm>
           <a:prstGeom prst="roundRect">
             <a:avLst>
@@ -14195,13 +14077,12 @@
             </a:avLst>
           </a:prstGeom>
           <a:solidFill>
-            <a:srgbClr val="EAE5D8"/>
+            <a:srgbClr val="FBF9F4"/>
           </a:solidFill>
           <a:ln w="9525">
             <a:solidFill>
-              <a:srgbClr val="B8AE9A"/>
+              <a:srgbClr val="DDD6C8"/>
             </a:solidFill>
-            <a:prstDash val="dash"/>
           </a:ln>
           <a:effectLst/>
         </p:spPr>
@@ -14229,143 +14110,14 @@
       </p:sp>
       <p:sp>
         <p:nvSpPr>
-          <p:cNvPr id="20" name="TextBox 19"/>
-          <p:cNvSpPr txBox="1"/>
-          <p:nvPr/>
-        </p:nvSpPr>
-        <p:spPr>
-          <a:xfrm>
-            <a:off x="996696" y="3017520"/>
-            <a:ext cx="3017520" cy="822960"/>
-          </a:xfrm>
-          <a:prstGeom prst="rect">
-            <a:avLst/>
-          </a:prstGeom>
-          <a:noFill/>
-        </p:spPr>
-        <p:txBody>
-          <a:bodyPr wrap="square" lIns="0" rIns="0" tIns="0" bIns="0" anchor="ctr">
-            <a:spAutoFit/>
-          </a:bodyPr>
-          <a:lstStyle/>
-          <a:p>
-            <a:pPr algn="ctr"/>
-            <a:r>
-              <a:rPr sz="1600" b="1" i="0">
-                <a:solidFill>
-                  <a:srgbClr val="5D6660"/>
-                </a:solidFill>
-                <a:latin typeface="Noto Sans KR"/>
-                <a:ea typeface="Noto Sans KR"/>
-                <a:cs typeface="Noto Sans KR"/>
-              </a:rPr>
-              <a:t>사진 삽입</a:t>
-            </a:r>
-          </a:p>
-          <a:p>
-            <a:pPr algn="ctr">
-              <a:spcBef>
-                <a:spcPts val="600"/>
-              </a:spcBef>
-            </a:pPr>
-            <a:r>
-              <a:rPr sz="1200" b="0" i="0">
-                <a:solidFill>
-                  <a:srgbClr val="5D6660"/>
-                </a:solidFill>
-                <a:latin typeface="Noto Sans KR"/>
-                <a:ea typeface="Noto Sans KR"/>
-                <a:cs typeface="Noto Sans KR"/>
-              </a:rPr>
-              <a:t>산불이 번지는 모습</a:t>
-            </a:r>
-          </a:p>
-        </p:txBody>
-      </p:sp>
-      <p:sp>
-        <p:nvSpPr>
-          <p:cNvPr id="21" name="TextBox 20"/>
-          <p:cNvSpPr txBox="1"/>
-          <p:nvPr/>
-        </p:nvSpPr>
-        <p:spPr>
-          <a:xfrm>
-            <a:off x="813816" y="5184648"/>
-            <a:ext cx="3383280" cy="274320"/>
-          </a:xfrm>
-          <a:prstGeom prst="rect">
-            <a:avLst/>
-          </a:prstGeom>
-          <a:noFill/>
-        </p:spPr>
-        <p:txBody>
-          <a:bodyPr wrap="square" lIns="0" rIns="0" tIns="0" bIns="0" anchor="t">
-            <a:spAutoFit/>
-          </a:bodyPr>
-          <a:lstStyle/>
-          <a:p>
-            <a:pPr algn="l"/>
-            <a:r>
-              <a:rPr sz="1500" b="1" i="0">
-                <a:solidFill>
-                  <a:srgbClr val="1E2622"/>
-                </a:solidFill>
-                <a:latin typeface="Noto Sans KR"/>
-                <a:ea typeface="Noto Sans KR"/>
-                <a:cs typeface="Noto Sans KR"/>
-              </a:rPr>
-              <a:t>번지는 불길</a:t>
-            </a:r>
-          </a:p>
-        </p:txBody>
-      </p:sp>
-      <p:sp>
-        <p:nvSpPr>
-          <p:cNvPr id="22" name="TextBox 21"/>
-          <p:cNvSpPr txBox="1"/>
-          <p:nvPr/>
-        </p:nvSpPr>
-        <p:spPr>
-          <a:xfrm>
-            <a:off x="813816" y="5504688"/>
-            <a:ext cx="3383280" cy="228600"/>
-          </a:xfrm>
-          <a:prstGeom prst="rect">
-            <a:avLst/>
-          </a:prstGeom>
-          <a:noFill/>
-        </p:spPr>
-        <p:txBody>
-          <a:bodyPr wrap="square" lIns="0" rIns="0" tIns="0" bIns="0" anchor="t">
-            <a:spAutoFit/>
-          </a:bodyPr>
-          <a:lstStyle/>
-          <a:p>
-            <a:pPr algn="l"/>
-            <a:r>
-              <a:rPr sz="1100" b="0" i="0">
-                <a:solidFill>
-                  <a:srgbClr val="5D6660"/>
-                </a:solidFill>
-                <a:latin typeface="Noto Sans KR"/>
-                <a:ea typeface="Noto Sans KR"/>
-                <a:cs typeface="Noto Sans KR"/>
-              </a:rPr>
-              <a:t>출처: </a:t>
-            </a:r>
-          </a:p>
-        </p:txBody>
-      </p:sp>
-      <p:sp>
-        <p:nvSpPr>
-          <p:cNvPr id="23" name="Rounded Rectangle 22"/>
-          <p:cNvSpPr/>
-          <p:nvPr/>
-        </p:nvSpPr>
-        <p:spPr>
-          <a:xfrm>
-            <a:off x="4407408" y="1783080"/>
-            <a:ext cx="3383280" cy="3291840"/>
+          <p:cNvPr id="20" name="Rounded Rectangle 19"/>
+          <p:cNvSpPr/>
+          <p:nvPr/>
+        </p:nvSpPr>
+        <p:spPr>
+          <a:xfrm>
+            <a:off x="7726679" y="1783080"/>
+            <a:ext cx="3977639" cy="3611880"/>
           </a:xfrm>
           <a:prstGeom prst="roundRect">
             <a:avLst>
@@ -14373,13 +14125,12 @@
             </a:avLst>
           </a:prstGeom>
           <a:solidFill>
-            <a:srgbClr val="EAE5D8"/>
+            <a:srgbClr val="FBF9F4"/>
           </a:solidFill>
           <a:ln w="9525">
             <a:solidFill>
-              <a:srgbClr val="B8AE9A"/>
+              <a:srgbClr val="DDD6C8"/>
             </a:solidFill>
-            <a:prstDash val="dash"/>
           </a:ln>
           <a:effectLst/>
         </p:spPr>
@@ -14407,69 +14158,283 @@
       </p:sp>
       <p:sp>
         <p:nvSpPr>
-          <p:cNvPr id="24" name="TextBox 23"/>
+          <p:cNvPr id="21" name="TextBox 20"/>
           <p:cNvSpPr txBox="1"/>
           <p:nvPr/>
         </p:nvSpPr>
         <p:spPr>
           <a:xfrm>
-            <a:off x="4590288" y="3017520"/>
-            <a:ext cx="3017520" cy="822960"/>
-          </a:xfrm>
-          <a:prstGeom prst="rect">
-            <a:avLst/>
-          </a:prstGeom>
-          <a:noFill/>
-        </p:spPr>
-        <p:txBody>
-          <a:bodyPr wrap="square" lIns="0" rIns="0" tIns="0" bIns="0" anchor="ctr">
+            <a:off x="1042415" y="1965960"/>
+            <a:ext cx="6217920" cy="274320"/>
+          </a:xfrm>
+          <a:prstGeom prst="rect">
+            <a:avLst/>
+          </a:prstGeom>
+          <a:noFill/>
+        </p:spPr>
+        <p:txBody>
+          <a:bodyPr wrap="square" lIns="0" rIns="0" tIns="0" bIns="0" anchor="t">
             <a:spAutoFit/>
           </a:bodyPr>
           <a:lstStyle/>
           <a:p>
-            <a:pPr algn="ctr"/>
-            <a:r>
-              <a:rPr sz="1600" b="1" i="0">
-                <a:solidFill>
-                  <a:srgbClr val="5D6660"/>
+            <a:pPr algn="l"/>
+            <a:r>
+              <a:rPr sz="1500" b="1" i="0">
+                <a:solidFill>
+                  <a:srgbClr val="1E2622"/>
                 </a:solidFill>
                 <a:latin typeface="Noto Sans KR"/>
                 <a:ea typeface="Noto Sans KR"/>
                 <a:cs typeface="Noto Sans KR"/>
               </a:rPr>
-              <a:t>사진 삽입</a:t>
-            </a:r>
-          </a:p>
-          <a:p>
-            <a:pPr algn="ctr">
+              <a:t>연평균기온 상승 속도</a:t>
+            </a:r>
+          </a:p>
+        </p:txBody>
+      </p:sp>
+      <p:sp>
+        <p:nvSpPr>
+          <p:cNvPr id="22" name="TextBox 21"/>
+          <p:cNvSpPr txBox="1"/>
+          <p:nvPr/>
+        </p:nvSpPr>
+        <p:spPr>
+          <a:xfrm>
+            <a:off x="1042415" y="2258568"/>
+            <a:ext cx="6217920" cy="228600"/>
+          </a:xfrm>
+          <a:prstGeom prst="rect">
+            <a:avLst/>
+          </a:prstGeom>
+          <a:noFill/>
+        </p:spPr>
+        <p:txBody>
+          <a:bodyPr wrap="square" lIns="0" rIns="0" tIns="0" bIns="0" anchor="t">
+            <a:spAutoFit/>
+          </a:bodyPr>
+          <a:lstStyle/>
+          <a:p>
+            <a:pPr algn="l"/>
+            <a:r>
+              <a:rPr sz="1100" b="0" i="0">
+                <a:solidFill>
+                  <a:srgbClr val="5D6660"/>
+                </a:solidFill>
+                <a:latin typeface="Noto Sans KR"/>
+                <a:ea typeface="Noto Sans KR"/>
+                <a:cs typeface="Noto Sans KR"/>
+              </a:rPr>
+              <a:t>℃ / 10년 · 기간이 짧을수록 상승 속도가 빠르다</a:t>
+            </a:r>
+          </a:p>
+        </p:txBody>
+      </p:sp>
+      <p:graphicFrame>
+        <p:nvGraphicFramePr>
+          <p:cNvPr id="23" name="Chart 22"/>
+          <p:cNvGraphicFramePr>
+            <a:graphicFrameLocks noGrp="1"/>
+          </p:cNvGraphicFramePr>
+          <p:nvPr/>
+        </p:nvGraphicFramePr>
+        <p:xfrm>
+          <a:off x="914400" y="2560320"/>
+          <a:ext cx="6400800" cy="2697480"/>
+        </p:xfrm>
+        <a:graphic>
+          <a:graphicData uri="http://schemas.openxmlformats.org/drawingml/2006/chart">
+            <c:chart xmlns:c="http://schemas.openxmlformats.org/drawingml/2006/chart" r:id="rId3"/>
+          </a:graphicData>
+        </a:graphic>
+      </p:graphicFrame>
+      <p:sp>
+        <p:nvSpPr>
+          <p:cNvPr id="24" name="TextBox 23"/>
+          <p:cNvSpPr txBox="1"/>
+          <p:nvPr/>
+        </p:nvSpPr>
+        <p:spPr>
+          <a:xfrm>
+            <a:off x="8001000" y="2011680"/>
+            <a:ext cx="3474720" cy="274320"/>
+          </a:xfrm>
+          <a:prstGeom prst="rect">
+            <a:avLst/>
+          </a:prstGeom>
+          <a:noFill/>
+        </p:spPr>
+        <p:txBody>
+          <a:bodyPr wrap="square" lIns="0" rIns="0" tIns="0" bIns="0" anchor="t">
+            <a:spAutoFit/>
+          </a:bodyPr>
+          <a:lstStyle/>
+          <a:p>
+            <a:pPr algn="l"/>
+            <a:r>
+              <a:rPr sz="1300" b="1" i="0">
+                <a:solidFill>
+                  <a:srgbClr val="5D6660"/>
+                </a:solidFill>
+                <a:latin typeface="Noto Sans KR"/>
+                <a:ea typeface="Noto Sans KR"/>
+                <a:cs typeface="Noto Sans KR"/>
+              </a:rPr>
+              <a:t>2024년 전국 평균기온</a:t>
+            </a:r>
+          </a:p>
+        </p:txBody>
+      </p:sp>
+      <p:sp>
+        <p:nvSpPr>
+          <p:cNvPr id="25" name="TextBox 24"/>
+          <p:cNvSpPr txBox="1"/>
+          <p:nvPr/>
+        </p:nvSpPr>
+        <p:spPr>
+          <a:xfrm>
+            <a:off x="8001000" y="2331720"/>
+            <a:ext cx="3474720" cy="731520"/>
+          </a:xfrm>
+          <a:prstGeom prst="rect">
+            <a:avLst/>
+          </a:prstGeom>
+          <a:noFill/>
+        </p:spPr>
+        <p:txBody>
+          <a:bodyPr wrap="square" lIns="0" rIns="0" tIns="0" bIns="0" anchor="t">
+            <a:spAutoFit/>
+          </a:bodyPr>
+          <a:lstStyle/>
+          <a:p>
+            <a:pPr algn="l"/>
+            <a:r>
+              <a:rPr sz="4000" b="1" i="0">
+                <a:solidFill>
+                  <a:srgbClr val="A8461A"/>
+                </a:solidFill>
+                <a:latin typeface="Noto Serif KR"/>
+                <a:ea typeface="Noto Serif KR"/>
+                <a:cs typeface="Noto Serif KR"/>
+              </a:rPr>
+              <a:t>14.5℃</a:t>
+            </a:r>
+          </a:p>
+        </p:txBody>
+      </p:sp>
+      <p:sp>
+        <p:nvSpPr>
+          <p:cNvPr id="26" name="TextBox 25"/>
+          <p:cNvSpPr txBox="1"/>
+          <p:nvPr/>
+        </p:nvSpPr>
+        <p:spPr>
+          <a:xfrm>
+            <a:off x="8001000" y="3154680"/>
+            <a:ext cx="3474720" cy="822960"/>
+          </a:xfrm>
+          <a:prstGeom prst="rect">
+            <a:avLst/>
+          </a:prstGeom>
+          <a:noFill/>
+        </p:spPr>
+        <p:txBody>
+          <a:bodyPr wrap="square" lIns="0" rIns="0" tIns="0" bIns="0" anchor="t">
+            <a:spAutoFit/>
+          </a:bodyPr>
+          <a:lstStyle/>
+          <a:p>
+            <a:pPr algn="l"/>
+            <a:r>
+              <a:rPr sz="1300" b="0" i="0">
+                <a:solidFill>
+                  <a:srgbClr val="1E2622"/>
+                </a:solidFill>
+                <a:latin typeface="Noto Sans KR"/>
+                <a:ea typeface="Noto Sans KR"/>
+                <a:cs typeface="Noto Sans KR"/>
+              </a:rPr>
+              <a:t>직전 30년 평균(12.5℃)보다 2.0℃ 높아 1973년 관측 이후 최고</a:t>
+            </a:r>
+          </a:p>
+        </p:txBody>
+      </p:sp>
+      <p:sp>
+        <p:nvSpPr>
+          <p:cNvPr id="27" name="TextBox 26"/>
+          <p:cNvSpPr txBox="1"/>
+          <p:nvPr/>
+        </p:nvSpPr>
+        <p:spPr>
+          <a:xfrm>
+            <a:off x="8001000" y="4114800"/>
+            <a:ext cx="3474720" cy="1188720"/>
+          </a:xfrm>
+          <a:prstGeom prst="rect">
+            <a:avLst/>
+          </a:prstGeom>
+          <a:noFill/>
+        </p:spPr>
+        <p:txBody>
+          <a:bodyPr wrap="square" lIns="0" rIns="0" tIns="0" bIns="0" anchor="t">
+            <a:spAutoFit/>
+          </a:bodyPr>
+          <a:lstStyle/>
+          <a:p>
+            <a:pPr algn="l"/>
+            <a:r>
+              <a:rPr sz="1300" b="1" i="0">
+                <a:solidFill>
+                  <a:srgbClr val="1E2622"/>
+                </a:solidFill>
+                <a:latin typeface="Noto Sans KR"/>
+                <a:ea typeface="Noto Sans KR"/>
+                <a:cs typeface="Noto Sans KR"/>
+              </a:rPr>
+              <a:t>봄(특히 3월)</a:t>
+            </a:r>
+            <a:r>
+              <a:rPr sz="1300" b="0" i="0">
+                <a:solidFill>
+                  <a:srgbClr val="1E2622"/>
+                </a:solidFill>
+                <a:latin typeface="Noto Sans KR"/>
+                <a:ea typeface="Noto Sans KR"/>
+                <a:cs typeface="Noto Sans KR"/>
+              </a:rPr>
+              <a:t>의 상승 폭이 계절 중 가장 크다</a:t>
+            </a:r>
+          </a:p>
+          <a:p>
+            <a:pPr algn="l">
               <a:spcBef>
                 <a:spcPts val="600"/>
               </a:spcBef>
             </a:pPr>
             <a:r>
-              <a:rPr sz="1200" b="0" i="0">
-                <a:solidFill>
-                  <a:srgbClr val="5D6660"/>
+              <a:rPr sz="1300" b="0" i="0">
+                <a:solidFill>
+                  <a:srgbClr val="1E2622"/>
                 </a:solidFill>
                 <a:latin typeface="Noto Sans KR"/>
                 <a:ea typeface="Noto Sans KR"/>
                 <a:cs typeface="Noto Sans KR"/>
               </a:rPr>
-              <a:t>산불 이후의 숲</a:t>
-            </a:r>
-          </a:p>
-        </p:txBody>
-      </p:sp>
-      <p:sp>
-        <p:nvSpPr>
-          <p:cNvPr id="25" name="TextBox 24"/>
+              <a:t>연강수일수는 10년당 약 0.7일 감소</a:t>
+            </a:r>
+          </a:p>
+        </p:txBody>
+      </p:sp>
+      <p:sp>
+        <p:nvSpPr>
+          <p:cNvPr id="28" name="TextBox 27"/>
           <p:cNvSpPr txBox="1"/>
           <p:nvPr/>
         </p:nvSpPr>
         <p:spPr>
           <a:xfrm>
-            <a:off x="4407408" y="5184648"/>
-            <a:ext cx="3383280" cy="274320"/>
+            <a:off x="813816" y="5577840"/>
+            <a:ext cx="10881360" cy="457200"/>
           </a:xfrm>
           <a:prstGeom prst="rect">
             <a:avLst/>
@@ -14484,7 +14449,7 @@
           <a:p>
             <a:pPr algn="l"/>
             <a:r>
-              <a:rPr sz="1500" b="1" i="0">
+              <a:rPr sz="1600" b="0" i="0">
                 <a:solidFill>
                   <a:srgbClr val="1E2622"/>
                 </a:solidFill>
@@ -14492,222 +14457,29 @@
                 <a:ea typeface="Noto Sans KR"/>
                 <a:cs typeface="Noto Sans KR"/>
               </a:rPr>
-              <a:t>불이 지나간 뒤의 숲</a:t>
-            </a:r>
-          </a:p>
-        </p:txBody>
-      </p:sp>
-      <p:sp>
-        <p:nvSpPr>
-          <p:cNvPr id="26" name="TextBox 25"/>
-          <p:cNvSpPr txBox="1"/>
-          <p:nvPr/>
-        </p:nvSpPr>
-        <p:spPr>
-          <a:xfrm>
-            <a:off x="4407408" y="5504688"/>
-            <a:ext cx="3383280" cy="228600"/>
-          </a:xfrm>
-          <a:prstGeom prst="rect">
-            <a:avLst/>
-          </a:prstGeom>
-          <a:noFill/>
-        </p:spPr>
-        <p:txBody>
-          <a:bodyPr wrap="square" lIns="0" rIns="0" tIns="0" bIns="0" anchor="t">
-            <a:spAutoFit/>
-          </a:bodyPr>
-          <a:lstStyle/>
-          <a:p>
-            <a:pPr algn="l"/>
-            <a:r>
-              <a:rPr sz="1100" b="0" i="0">
-                <a:solidFill>
-                  <a:srgbClr val="5D6660"/>
+              <a:t>산불이 집중되는 </a:t>
+            </a:r>
+            <a:r>
+              <a:rPr sz="1600" b="1" i="0">
+                <a:solidFill>
+                  <a:srgbClr val="1E2622"/>
                 </a:solidFill>
                 <a:latin typeface="Noto Sans KR"/>
                 <a:ea typeface="Noto Sans KR"/>
                 <a:cs typeface="Noto Sans KR"/>
               </a:rPr>
-              <a:t>출처: </a:t>
-            </a:r>
-          </a:p>
-        </p:txBody>
-      </p:sp>
-      <p:sp>
-        <p:nvSpPr>
-          <p:cNvPr id="27" name="Rounded Rectangle 26"/>
-          <p:cNvSpPr/>
-          <p:nvPr/>
-        </p:nvSpPr>
-        <p:spPr>
-          <a:xfrm>
-            <a:off x="7991856" y="1783080"/>
-            <a:ext cx="3383280" cy="3291840"/>
-          </a:xfrm>
-          <a:prstGeom prst="roundRect">
-            <a:avLst>
-              <a:gd name="adj" fmla="val 5000"/>
-            </a:avLst>
-          </a:prstGeom>
-          <a:solidFill>
-            <a:srgbClr val="EAE5D8"/>
-          </a:solidFill>
-          <a:ln w="9525">
-            <a:solidFill>
-              <a:srgbClr val="B8AE9A"/>
-            </a:solidFill>
-            <a:prstDash val="dash"/>
-          </a:ln>
-          <a:effectLst/>
-        </p:spPr>
-        <p:style>
-          <a:lnRef idx="1">
-            <a:schemeClr val="accent1"/>
-          </a:lnRef>
-          <a:fillRef idx="3">
-            <a:schemeClr val="accent1"/>
-          </a:fillRef>
-          <a:effectRef idx="2">
-            <a:schemeClr val="accent1"/>
-          </a:effectRef>
-          <a:fontRef idx="minor">
-            <a:schemeClr val="lt1"/>
-          </a:fontRef>
-        </p:style>
-        <p:txBody>
-          <a:bodyPr rtlCol="0" anchor="ctr"/>
-          <a:lstStyle/>
-          <a:p>
-            <a:pPr algn="ctr"/>
-          </a:p>
-        </p:txBody>
-      </p:sp>
-      <p:sp>
-        <p:nvSpPr>
-          <p:cNvPr id="28" name="TextBox 27"/>
-          <p:cNvSpPr txBox="1"/>
-          <p:nvPr/>
-        </p:nvSpPr>
-        <p:spPr>
-          <a:xfrm>
-            <a:off x="8174736" y="3017520"/>
-            <a:ext cx="3017520" cy="822960"/>
-          </a:xfrm>
-          <a:prstGeom prst="rect">
-            <a:avLst/>
-          </a:prstGeom>
-          <a:noFill/>
-        </p:spPr>
-        <p:txBody>
-          <a:bodyPr wrap="square" lIns="0" rIns="0" tIns="0" bIns="0" anchor="ctr">
-            <a:spAutoFit/>
-          </a:bodyPr>
-          <a:lstStyle/>
-          <a:p>
-            <a:pPr algn="ctr"/>
-            <a:r>
-              <a:rPr sz="1600" b="1" i="0">
-                <a:solidFill>
-                  <a:srgbClr val="5D6660"/>
+              <a:t>봄</a:t>
+            </a:r>
+            <a:r>
+              <a:rPr sz="1600" b="0" i="0">
+                <a:solidFill>
+                  <a:srgbClr val="1E2622"/>
                 </a:solidFill>
                 <a:latin typeface="Noto Sans KR"/>
                 <a:ea typeface="Noto Sans KR"/>
                 <a:cs typeface="Noto Sans KR"/>
               </a:rPr>
-              <a:t>사진 삽입</a:t>
-            </a:r>
-          </a:p>
-          <a:p>
-            <a:pPr algn="ctr">
-              <a:spcBef>
-                <a:spcPts val="600"/>
-              </a:spcBef>
-            </a:pPr>
-            <a:r>
-              <a:rPr sz="1200" b="0" i="0">
-                <a:solidFill>
-                  <a:srgbClr val="5D6660"/>
-                </a:solidFill>
-                <a:latin typeface="Noto Sans KR"/>
-                <a:ea typeface="Noto Sans KR"/>
-                <a:cs typeface="Noto Sans KR"/>
-              </a:rPr>
-              <a:t>산불 피해 주민</a:t>
-            </a:r>
-          </a:p>
-        </p:txBody>
-      </p:sp>
-      <p:sp>
-        <p:nvSpPr>
-          <p:cNvPr id="29" name="TextBox 28"/>
-          <p:cNvSpPr txBox="1"/>
-          <p:nvPr/>
-        </p:nvSpPr>
-        <p:spPr>
-          <a:xfrm>
-            <a:off x="7991856" y="5184648"/>
-            <a:ext cx="3383280" cy="274320"/>
-          </a:xfrm>
-          <a:prstGeom prst="rect">
-            <a:avLst/>
-          </a:prstGeom>
-          <a:noFill/>
-        </p:spPr>
-        <p:txBody>
-          <a:bodyPr wrap="square" lIns="0" rIns="0" tIns="0" bIns="0" anchor="t">
-            <a:spAutoFit/>
-          </a:bodyPr>
-          <a:lstStyle/>
-          <a:p>
-            <a:pPr algn="l"/>
-            <a:r>
-              <a:rPr sz="1500" b="1" i="0">
-                <a:solidFill>
-                  <a:srgbClr val="1E2622"/>
-                </a:solidFill>
-                <a:latin typeface="Noto Sans KR"/>
-                <a:ea typeface="Noto Sans KR"/>
-                <a:cs typeface="Noto Sans KR"/>
-              </a:rPr>
-              <a:t>삶의 터전을 잃은 주민</a:t>
-            </a:r>
-          </a:p>
-        </p:txBody>
-      </p:sp>
-      <p:sp>
-        <p:nvSpPr>
-          <p:cNvPr id="30" name="TextBox 29"/>
-          <p:cNvSpPr txBox="1"/>
-          <p:nvPr/>
-        </p:nvSpPr>
-        <p:spPr>
-          <a:xfrm>
-            <a:off x="7991856" y="5504688"/>
-            <a:ext cx="3383280" cy="228600"/>
-          </a:xfrm>
-          <a:prstGeom prst="rect">
-            <a:avLst/>
-          </a:prstGeom>
-          <a:noFill/>
-        </p:spPr>
-        <p:txBody>
-          <a:bodyPr wrap="square" lIns="0" rIns="0" tIns="0" bIns="0" anchor="t">
-            <a:spAutoFit/>
-          </a:bodyPr>
-          <a:lstStyle/>
-          <a:p>
-            <a:pPr algn="l"/>
-            <a:r>
-              <a:rPr sz="1100" b="0" i="0">
-                <a:solidFill>
-                  <a:srgbClr val="5D6660"/>
-                </a:solidFill>
-                <a:latin typeface="Noto Sans KR"/>
-                <a:ea typeface="Noto Sans KR"/>
-                <a:cs typeface="Noto Sans KR"/>
-              </a:rPr>
-              <a:t>출처: </a:t>
+              <a:t>이 가장 빠르게 따뜻해지고 있다.</a:t>
             </a:r>
           </a:p>
         </p:txBody>
@@ -14821,7 +14593,7 @@
                 <a:ea typeface="Noto Serif KR" pitchFamily="18" charset="-122"/>
                 <a:cs typeface="Noto Serif KR" pitchFamily="18" charset="-120"/>
               </a:rPr>
-              <a:t>같은 산, 다른 숲</a:t>
+              <a:t>산불이 지나간 자리</a:t>
             </a:r>
             <a:endParaRPr lang="en-US" sz="3000" dirty="0"/>
           </a:p>
@@ -14931,7 +14703,7 @@
                 <a:ea typeface="Noto Sans KR" pitchFamily="34" charset="-122"/>
                 <a:cs typeface="Noto Sans KR" pitchFamily="34" charset="-120"/>
               </a:rPr>
-              <a:t>15</a:t>
+              <a:t>6</a:t>
             </a:r>
             <a:endParaRPr lang="en-US" sz="1200" dirty="0"/>
           </a:p>
@@ -14946,7 +14718,7 @@
         <p:spPr>
           <a:xfrm>
             <a:off x="813816" y="1783080"/>
-            <a:ext cx="5303520" cy="3291840"/>
+            <a:ext cx="3383280" cy="3291840"/>
           </a:xfrm>
           <a:prstGeom prst="roundRect">
             <a:avLst>
@@ -14995,7 +14767,7 @@
         <p:spPr>
           <a:xfrm>
             <a:off x="996696" y="3017520"/>
-            <a:ext cx="4937759" cy="822960"/>
+            <a:ext cx="3017520" cy="822960"/>
           </a:xfrm>
           <a:prstGeom prst="rect">
             <a:avLst/>
@@ -15036,7 +14808,7 @@
                 <a:ea typeface="Noto Sans KR"/>
                 <a:cs typeface="Noto Sans KR"/>
               </a:rPr>
-              <a:t>침엽수 인공림</a:t>
+              <a:t>산불이 번지는 모습</a:t>
             </a:r>
           </a:p>
         </p:txBody>
@@ -15050,7 +14822,7 @@
         <p:spPr>
           <a:xfrm>
             <a:off x="813816" y="5184648"/>
-            <a:ext cx="5303520" cy="274320"/>
+            <a:ext cx="3383280" cy="274320"/>
           </a:xfrm>
           <a:prstGeom prst="rect">
             <a:avLst/>
@@ -15073,7 +14845,7 @@
                 <a:ea typeface="Noto Sans KR"/>
                 <a:cs typeface="Noto Sans KR"/>
               </a:rPr>
-              <a:t>침엽수 인공림 · 밀식 단순림</a:t>
+              <a:t>번지는 불길</a:t>
             </a:r>
           </a:p>
         </p:txBody>
@@ -15087,7 +14859,7 @@
         <p:spPr>
           <a:xfrm>
             <a:off x="813816" y="5504688"/>
-            <a:ext cx="5303520" cy="228600"/>
+            <a:ext cx="3383280" cy="228600"/>
           </a:xfrm>
           <a:prstGeom prst="rect">
             <a:avLst/>
@@ -15123,8 +14895,8 @@
         </p:nvSpPr>
         <p:spPr>
           <a:xfrm>
-            <a:off x="6391656" y="1783080"/>
-            <a:ext cx="5303520" cy="3291840"/>
+            <a:off x="4407408" y="1783080"/>
+            <a:ext cx="3383280" cy="3291840"/>
           </a:xfrm>
           <a:prstGeom prst="roundRect">
             <a:avLst>
@@ -15172,8 +14944,8 @@
         </p:nvSpPr>
         <p:spPr>
           <a:xfrm>
-            <a:off x="6574536" y="3017520"/>
-            <a:ext cx="4937759" cy="822960"/>
+            <a:off x="4590288" y="3017520"/>
+            <a:ext cx="3017520" cy="822960"/>
           </a:xfrm>
           <a:prstGeom prst="rect">
             <a:avLst/>
@@ -15214,7 +14986,7 @@
                 <a:ea typeface="Noto Sans KR"/>
                 <a:cs typeface="Noto Sans KR"/>
               </a:rPr>
-              <a:t>활엽수 천연림</a:t>
+              <a:t>산불 이후의 숲</a:t>
             </a:r>
           </a:p>
         </p:txBody>
@@ -15227,8 +14999,8 @@
         </p:nvSpPr>
         <p:spPr>
           <a:xfrm>
-            <a:off x="6391656" y="5184648"/>
-            <a:ext cx="5303520" cy="274320"/>
+            <a:off x="4407408" y="5184648"/>
+            <a:ext cx="3383280" cy="274320"/>
           </a:xfrm>
           <a:prstGeom prst="rect">
             <a:avLst/>
@@ -15251,7 +15023,7 @@
                 <a:ea typeface="Noto Sans KR"/>
                 <a:cs typeface="Noto Sans KR"/>
               </a:rPr>
-              <a:t>활엽수 천연림 · 다층 혼효림</a:t>
+              <a:t>불이 지나간 뒤의 숲</a:t>
             </a:r>
           </a:p>
         </p:txBody>
@@ -15264,8 +15036,186 @@
         </p:nvSpPr>
         <p:spPr>
           <a:xfrm>
-            <a:off x="6391656" y="5504688"/>
-            <a:ext cx="5303520" cy="228600"/>
+            <a:off x="4407408" y="5504688"/>
+            <a:ext cx="3383280" cy="228600"/>
+          </a:xfrm>
+          <a:prstGeom prst="rect">
+            <a:avLst/>
+          </a:prstGeom>
+          <a:noFill/>
+        </p:spPr>
+        <p:txBody>
+          <a:bodyPr wrap="square" lIns="0" rIns="0" tIns="0" bIns="0" anchor="t">
+            <a:spAutoFit/>
+          </a:bodyPr>
+          <a:lstStyle/>
+          <a:p>
+            <a:pPr algn="l"/>
+            <a:r>
+              <a:rPr sz="1100" b="0" i="0">
+                <a:solidFill>
+                  <a:srgbClr val="5D6660"/>
+                </a:solidFill>
+                <a:latin typeface="Noto Sans KR"/>
+                <a:ea typeface="Noto Sans KR"/>
+                <a:cs typeface="Noto Sans KR"/>
+              </a:rPr>
+              <a:t>출처: </a:t>
+            </a:r>
+          </a:p>
+        </p:txBody>
+      </p:sp>
+      <p:sp>
+        <p:nvSpPr>
+          <p:cNvPr id="27" name="Rounded Rectangle 26"/>
+          <p:cNvSpPr/>
+          <p:nvPr/>
+        </p:nvSpPr>
+        <p:spPr>
+          <a:xfrm>
+            <a:off x="7991856" y="1783080"/>
+            <a:ext cx="3383280" cy="3291840"/>
+          </a:xfrm>
+          <a:prstGeom prst="roundRect">
+            <a:avLst>
+              <a:gd name="adj" fmla="val 5000"/>
+            </a:avLst>
+          </a:prstGeom>
+          <a:solidFill>
+            <a:srgbClr val="EAE5D8"/>
+          </a:solidFill>
+          <a:ln w="9525">
+            <a:solidFill>
+              <a:srgbClr val="B8AE9A"/>
+            </a:solidFill>
+            <a:prstDash val="dash"/>
+          </a:ln>
+          <a:effectLst/>
+        </p:spPr>
+        <p:style>
+          <a:lnRef idx="1">
+            <a:schemeClr val="accent1"/>
+          </a:lnRef>
+          <a:fillRef idx="3">
+            <a:schemeClr val="accent1"/>
+          </a:fillRef>
+          <a:effectRef idx="2">
+            <a:schemeClr val="accent1"/>
+          </a:effectRef>
+          <a:fontRef idx="minor">
+            <a:schemeClr val="lt1"/>
+          </a:fontRef>
+        </p:style>
+        <p:txBody>
+          <a:bodyPr rtlCol="0" anchor="ctr"/>
+          <a:lstStyle/>
+          <a:p>
+            <a:pPr algn="ctr"/>
+          </a:p>
+        </p:txBody>
+      </p:sp>
+      <p:sp>
+        <p:nvSpPr>
+          <p:cNvPr id="28" name="TextBox 27"/>
+          <p:cNvSpPr txBox="1"/>
+          <p:nvPr/>
+        </p:nvSpPr>
+        <p:spPr>
+          <a:xfrm>
+            <a:off x="8174736" y="3017520"/>
+            <a:ext cx="3017520" cy="822960"/>
+          </a:xfrm>
+          <a:prstGeom prst="rect">
+            <a:avLst/>
+          </a:prstGeom>
+          <a:noFill/>
+        </p:spPr>
+        <p:txBody>
+          <a:bodyPr wrap="square" lIns="0" rIns="0" tIns="0" bIns="0" anchor="ctr">
+            <a:spAutoFit/>
+          </a:bodyPr>
+          <a:lstStyle/>
+          <a:p>
+            <a:pPr algn="ctr"/>
+            <a:r>
+              <a:rPr sz="1600" b="1" i="0">
+                <a:solidFill>
+                  <a:srgbClr val="5D6660"/>
+                </a:solidFill>
+                <a:latin typeface="Noto Sans KR"/>
+                <a:ea typeface="Noto Sans KR"/>
+                <a:cs typeface="Noto Sans KR"/>
+              </a:rPr>
+              <a:t>사진 삽입</a:t>
+            </a:r>
+          </a:p>
+          <a:p>
+            <a:pPr algn="ctr">
+              <a:spcBef>
+                <a:spcPts val="600"/>
+              </a:spcBef>
+            </a:pPr>
+            <a:r>
+              <a:rPr sz="1200" b="0" i="0">
+                <a:solidFill>
+                  <a:srgbClr val="5D6660"/>
+                </a:solidFill>
+                <a:latin typeface="Noto Sans KR"/>
+                <a:ea typeface="Noto Sans KR"/>
+                <a:cs typeface="Noto Sans KR"/>
+              </a:rPr>
+              <a:t>산불 피해 주민</a:t>
+            </a:r>
+          </a:p>
+        </p:txBody>
+      </p:sp>
+      <p:sp>
+        <p:nvSpPr>
+          <p:cNvPr id="29" name="TextBox 28"/>
+          <p:cNvSpPr txBox="1"/>
+          <p:nvPr/>
+        </p:nvSpPr>
+        <p:spPr>
+          <a:xfrm>
+            <a:off x="7991856" y="5184648"/>
+            <a:ext cx="3383280" cy="274320"/>
+          </a:xfrm>
+          <a:prstGeom prst="rect">
+            <a:avLst/>
+          </a:prstGeom>
+          <a:noFill/>
+        </p:spPr>
+        <p:txBody>
+          <a:bodyPr wrap="square" lIns="0" rIns="0" tIns="0" bIns="0" anchor="t">
+            <a:spAutoFit/>
+          </a:bodyPr>
+          <a:lstStyle/>
+          <a:p>
+            <a:pPr algn="l"/>
+            <a:r>
+              <a:rPr sz="1500" b="1" i="0">
+                <a:solidFill>
+                  <a:srgbClr val="1E2622"/>
+                </a:solidFill>
+                <a:latin typeface="Noto Sans KR"/>
+                <a:ea typeface="Noto Sans KR"/>
+                <a:cs typeface="Noto Sans KR"/>
+              </a:rPr>
+              <a:t>삶의 터전을 잃은 주민</a:t>
+            </a:r>
+          </a:p>
+        </p:txBody>
+      </p:sp>
+      <p:sp>
+        <p:nvSpPr>
+          <p:cNvPr id="30" name="TextBox 29"/>
+          <p:cNvSpPr txBox="1"/>
+          <p:nvPr/>
+        </p:nvSpPr>
+        <p:spPr>
+          <a:xfrm>
+            <a:off x="7991856" y="5504688"/>
+            <a:ext cx="3383280" cy="228600"/>
           </a:xfrm>
           <a:prstGeom prst="rect">
             <a:avLst/>
@@ -15402,7 +15352,7 @@
                 <a:ea typeface="Noto Serif KR" pitchFamily="18" charset="-122"/>
                 <a:cs typeface="Noto Serif KR" pitchFamily="18" charset="-120"/>
               </a:rPr>
-              <a:t>숲가꾸기와 산림바이오매스 벌채</a:t>
+              <a:t>같은 산, 다른 숲</a:t>
             </a:r>
             <a:endParaRPr lang="en-US" sz="3000" dirty="0"/>
           </a:p>
@@ -15512,7 +15462,7 @@
                 <a:ea typeface="Noto Sans KR" pitchFamily="34" charset="-122"/>
                 <a:cs typeface="Noto Sans KR" pitchFamily="34" charset="-120"/>
               </a:rPr>
-              <a:t>18</a:t>
+              <a:t>16</a:t>
             </a:r>
             <a:endParaRPr lang="en-US" sz="1200" dirty="0"/>
           </a:p>
@@ -15527,7 +15477,7 @@
         <p:spPr>
           <a:xfrm>
             <a:off x="813816" y="1783080"/>
-            <a:ext cx="6949440" cy="3566160"/>
+            <a:ext cx="5303520" cy="3291840"/>
           </a:xfrm>
           <a:prstGeom prst="roundRect">
             <a:avLst>
@@ -15575,8 +15525,8 @@
         </p:nvSpPr>
         <p:spPr>
           <a:xfrm>
-            <a:off x="996696" y="3154679"/>
-            <a:ext cx="6583679" cy="822960"/>
+            <a:off x="996696" y="3017520"/>
+            <a:ext cx="4937759" cy="822960"/>
           </a:xfrm>
           <a:prstGeom prst="rect">
             <a:avLst/>
@@ -15617,7 +15567,7 @@
                 <a:ea typeface="Noto Sans KR"/>
                 <a:cs typeface="Noto Sans KR"/>
               </a:rPr>
-              <a:t>산림바이오매스 생산 벌채 현장</a:t>
+              <a:t>침엽수 인공림</a:t>
             </a:r>
           </a:p>
         </p:txBody>
@@ -15630,8 +15580,8 @@
         </p:nvSpPr>
         <p:spPr>
           <a:xfrm>
-            <a:off x="813816" y="5458968"/>
-            <a:ext cx="6949440" cy="274320"/>
+            <a:off x="813816" y="5184648"/>
+            <a:ext cx="5303520" cy="274320"/>
           </a:xfrm>
           <a:prstGeom prst="rect">
             <a:avLst/>
@@ -15654,7 +15604,7 @@
                 <a:ea typeface="Noto Sans KR"/>
                 <a:cs typeface="Noto Sans KR"/>
               </a:rPr>
-              <a:t>어린 나무가 베어지는 모습</a:t>
+              <a:t>침엽수 인공림 · 밀식 단순림</a:t>
             </a:r>
           </a:p>
         </p:txBody>
@@ -15667,8 +15617,8 @@
         </p:nvSpPr>
         <p:spPr>
           <a:xfrm>
-            <a:off x="813816" y="5779007"/>
-            <a:ext cx="6949440" cy="228600"/>
+            <a:off x="813816" y="5504688"/>
+            <a:ext cx="5303520" cy="228600"/>
           </a:xfrm>
           <a:prstGeom prst="rect">
             <a:avLst/>
@@ -15704,8 +15654,8 @@
         </p:nvSpPr>
         <p:spPr>
           <a:xfrm>
-            <a:off x="8138160" y="1783080"/>
-            <a:ext cx="3566160" cy="3566160"/>
+            <a:off x="6391656" y="1783080"/>
+            <a:ext cx="5303520" cy="3291840"/>
           </a:xfrm>
           <a:prstGeom prst="roundRect">
             <a:avLst>
@@ -15713,12 +15663,13 @@
             </a:avLst>
           </a:prstGeom>
           <a:solidFill>
-            <a:srgbClr val="FBF9F4"/>
+            <a:srgbClr val="EAE5D8"/>
           </a:solidFill>
           <a:ln w="9525">
             <a:solidFill>
-              <a:srgbClr val="DDD6C8"/>
+              <a:srgbClr val="B8AE9A"/>
             </a:solidFill>
+            <a:prstDash val="dash"/>
           </a:ln>
           <a:effectLst/>
         </p:spPr>
@@ -15752,67 +15703,123 @@
         </p:nvSpPr>
         <p:spPr>
           <a:xfrm>
-            <a:off x="8412480" y="2011680"/>
-            <a:ext cx="3017520" cy="3108960"/>
-          </a:xfrm>
-          <a:prstGeom prst="rect">
-            <a:avLst/>
-          </a:prstGeom>
-          <a:noFill/>
-        </p:spPr>
-        <p:txBody>
-          <a:bodyPr wrap="square" lIns="0" rIns="0" tIns="0" bIns="0" anchor="t">
+            <a:off x="6574536" y="3017520"/>
+            <a:ext cx="4937759" cy="822960"/>
+          </a:xfrm>
+          <a:prstGeom prst="rect">
+            <a:avLst/>
+          </a:prstGeom>
+          <a:noFill/>
+        </p:spPr>
+        <p:txBody>
+          <a:bodyPr wrap="square" lIns="0" rIns="0" tIns="0" bIns="0" anchor="ctr">
             <a:spAutoFit/>
           </a:bodyPr>
           <a:lstStyle/>
           <a:p>
-            <a:pPr algn="l"/>
-            <a:r>
-              <a:rPr sz="1500" b="1" i="0">
-                <a:solidFill>
-                  <a:srgbClr val="A8461A"/>
+            <a:pPr algn="ctr"/>
+            <a:r>
+              <a:rPr sz="1600" b="1" i="0">
+                <a:solidFill>
+                  <a:srgbClr val="5D6660"/>
                 </a:solidFill>
                 <a:latin typeface="Noto Sans KR"/>
                 <a:ea typeface="Noto Sans KR"/>
                 <a:cs typeface="Noto Sans KR"/>
               </a:rPr>
-              <a:t>이 장면이 던지는 질문</a:t>
-            </a:r>
-          </a:p>
-          <a:p>
-            <a:pPr algn="l">
+              <a:t>사진 삽입</a:t>
+            </a:r>
+          </a:p>
+          <a:p>
+            <a:pPr algn="ctr">
               <a:spcBef>
                 <a:spcPts val="600"/>
               </a:spcBef>
             </a:pPr>
             <a:r>
-              <a:rPr sz="1600" b="1" i="0">
-                <a:solidFill>
-                  <a:srgbClr val="1E2622"/>
+              <a:rPr sz="1200" b="0" i="0">
+                <a:solidFill>
+                  <a:srgbClr val="5D6660"/>
                 </a:solidFill>
                 <a:latin typeface="Noto Sans KR"/>
                 <a:ea typeface="Noto Sans KR"/>
                 <a:cs typeface="Noto Sans KR"/>
               </a:rPr>
-              <a:t>숲가꾸기·벌채 행위는 산불 발생과 관계가 있는가?</a:t>
-            </a:r>
-          </a:p>
-          <a:p>
-            <a:pPr algn="l">
-              <a:spcBef>
-                <a:spcPts val="600"/>
-              </a:spcBef>
-            </a:pPr>
-            <a:r>
-              <a:rPr sz="1300" b="0" i="0">
-                <a:solidFill>
-                  <a:srgbClr val="5D6660"/>
+              <a:t>활엽수 천연림</a:t>
+            </a:r>
+          </a:p>
+        </p:txBody>
+      </p:sp>
+      <p:sp>
+        <p:nvSpPr>
+          <p:cNvPr id="25" name="TextBox 24"/>
+          <p:cNvSpPr txBox="1"/>
+          <p:nvPr/>
+        </p:nvSpPr>
+        <p:spPr>
+          <a:xfrm>
+            <a:off x="6391656" y="5184648"/>
+            <a:ext cx="5303520" cy="274320"/>
+          </a:xfrm>
+          <a:prstGeom prst="rect">
+            <a:avLst/>
+          </a:prstGeom>
+          <a:noFill/>
+        </p:spPr>
+        <p:txBody>
+          <a:bodyPr wrap="square" lIns="0" rIns="0" tIns="0" bIns="0" anchor="t">
+            <a:spAutoFit/>
+          </a:bodyPr>
+          <a:lstStyle/>
+          <a:p>
+            <a:pPr algn="l"/>
+            <a:r>
+              <a:rPr sz="1500" b="1" i="0">
+                <a:solidFill>
+                  <a:srgbClr val="1E2622"/>
                 </a:solidFill>
                 <a:latin typeface="Noto Sans KR"/>
                 <a:ea typeface="Noto Sans KR"/>
                 <a:cs typeface="Noto Sans KR"/>
               </a:rPr>
-              <a:t>다음 슬라이드에서 분석 결과로 확인합니다.</a:t>
+              <a:t>활엽수 천연림 · 다층 혼효림</a:t>
+            </a:r>
+          </a:p>
+        </p:txBody>
+      </p:sp>
+      <p:sp>
+        <p:nvSpPr>
+          <p:cNvPr id="26" name="TextBox 25"/>
+          <p:cNvSpPr txBox="1"/>
+          <p:nvPr/>
+        </p:nvSpPr>
+        <p:spPr>
+          <a:xfrm>
+            <a:off x="6391656" y="5504688"/>
+            <a:ext cx="5303520" cy="228600"/>
+          </a:xfrm>
+          <a:prstGeom prst="rect">
+            <a:avLst/>
+          </a:prstGeom>
+          <a:noFill/>
+        </p:spPr>
+        <p:txBody>
+          <a:bodyPr wrap="square" lIns="0" rIns="0" tIns="0" bIns="0" anchor="t">
+            <a:spAutoFit/>
+          </a:bodyPr>
+          <a:lstStyle/>
+          <a:p>
+            <a:pPr algn="l"/>
+            <a:r>
+              <a:rPr sz="1100" b="0" i="0">
+                <a:solidFill>
+                  <a:srgbClr val="5D6660"/>
+                </a:solidFill>
+                <a:latin typeface="Noto Sans KR"/>
+                <a:ea typeface="Noto Sans KR"/>
+                <a:cs typeface="Noto Sans KR"/>
+              </a:rPr>
+              <a:t>출처: </a:t>
             </a:r>
           </a:p>
         </p:txBody>
@@ -15926,7 +15933,7 @@
                 <a:ea typeface="Noto Serif KR" pitchFamily="18" charset="-122"/>
                 <a:cs typeface="Noto Serif KR" pitchFamily="18" charset="-120"/>
               </a:rPr>
-              <a:t>임도와 등산로</a:t>
+              <a:t>숲가꾸기와 산림바이오매스 벌채</a:t>
             </a:r>
             <a:endParaRPr lang="en-US" sz="3000" dirty="0"/>
           </a:p>
@@ -16036,7 +16043,531 @@
                 <a:ea typeface="Noto Sans KR" pitchFamily="34" charset="-122"/>
                 <a:cs typeface="Noto Sans KR" pitchFamily="34" charset="-120"/>
               </a:rPr>
-              <a:t>20</a:t>
+              <a:t>19</a:t>
+            </a:r>
+            <a:endParaRPr lang="en-US" sz="1200" dirty="0"/>
+          </a:p>
+        </p:txBody>
+      </p:sp>
+      <p:sp>
+        <p:nvSpPr>
+          <p:cNvPr id="19" name="Rounded Rectangle 18"/>
+          <p:cNvSpPr/>
+          <p:nvPr/>
+        </p:nvSpPr>
+        <p:spPr>
+          <a:xfrm>
+            <a:off x="813816" y="1783080"/>
+            <a:ext cx="6949440" cy="3566160"/>
+          </a:xfrm>
+          <a:prstGeom prst="roundRect">
+            <a:avLst>
+              <a:gd name="adj" fmla="val 5000"/>
+            </a:avLst>
+          </a:prstGeom>
+          <a:solidFill>
+            <a:srgbClr val="EAE5D8"/>
+          </a:solidFill>
+          <a:ln w="9525">
+            <a:solidFill>
+              <a:srgbClr val="B8AE9A"/>
+            </a:solidFill>
+            <a:prstDash val="dash"/>
+          </a:ln>
+          <a:effectLst/>
+        </p:spPr>
+        <p:style>
+          <a:lnRef idx="1">
+            <a:schemeClr val="accent1"/>
+          </a:lnRef>
+          <a:fillRef idx="3">
+            <a:schemeClr val="accent1"/>
+          </a:fillRef>
+          <a:effectRef idx="2">
+            <a:schemeClr val="accent1"/>
+          </a:effectRef>
+          <a:fontRef idx="minor">
+            <a:schemeClr val="lt1"/>
+          </a:fontRef>
+        </p:style>
+        <p:txBody>
+          <a:bodyPr rtlCol="0" anchor="ctr"/>
+          <a:lstStyle/>
+          <a:p>
+            <a:pPr algn="ctr"/>
+          </a:p>
+        </p:txBody>
+      </p:sp>
+      <p:sp>
+        <p:nvSpPr>
+          <p:cNvPr id="20" name="TextBox 19"/>
+          <p:cNvSpPr txBox="1"/>
+          <p:nvPr/>
+        </p:nvSpPr>
+        <p:spPr>
+          <a:xfrm>
+            <a:off x="996696" y="3154679"/>
+            <a:ext cx="6583679" cy="822960"/>
+          </a:xfrm>
+          <a:prstGeom prst="rect">
+            <a:avLst/>
+          </a:prstGeom>
+          <a:noFill/>
+        </p:spPr>
+        <p:txBody>
+          <a:bodyPr wrap="square" lIns="0" rIns="0" tIns="0" bIns="0" anchor="ctr">
+            <a:spAutoFit/>
+          </a:bodyPr>
+          <a:lstStyle/>
+          <a:p>
+            <a:pPr algn="ctr"/>
+            <a:r>
+              <a:rPr sz="1600" b="1" i="0">
+                <a:solidFill>
+                  <a:srgbClr val="5D6660"/>
+                </a:solidFill>
+                <a:latin typeface="Noto Sans KR"/>
+                <a:ea typeface="Noto Sans KR"/>
+                <a:cs typeface="Noto Sans KR"/>
+              </a:rPr>
+              <a:t>사진 삽입</a:t>
+            </a:r>
+          </a:p>
+          <a:p>
+            <a:pPr algn="ctr">
+              <a:spcBef>
+                <a:spcPts val="600"/>
+              </a:spcBef>
+            </a:pPr>
+            <a:r>
+              <a:rPr sz="1200" b="0" i="0">
+                <a:solidFill>
+                  <a:srgbClr val="5D6660"/>
+                </a:solidFill>
+                <a:latin typeface="Noto Sans KR"/>
+                <a:ea typeface="Noto Sans KR"/>
+                <a:cs typeface="Noto Sans KR"/>
+              </a:rPr>
+              <a:t>산림바이오매스 생산 벌채 현장</a:t>
+            </a:r>
+          </a:p>
+        </p:txBody>
+      </p:sp>
+      <p:sp>
+        <p:nvSpPr>
+          <p:cNvPr id="21" name="TextBox 20"/>
+          <p:cNvSpPr txBox="1"/>
+          <p:nvPr/>
+        </p:nvSpPr>
+        <p:spPr>
+          <a:xfrm>
+            <a:off x="813816" y="5458968"/>
+            <a:ext cx="6949440" cy="274320"/>
+          </a:xfrm>
+          <a:prstGeom prst="rect">
+            <a:avLst/>
+          </a:prstGeom>
+          <a:noFill/>
+        </p:spPr>
+        <p:txBody>
+          <a:bodyPr wrap="square" lIns="0" rIns="0" tIns="0" bIns="0" anchor="t">
+            <a:spAutoFit/>
+          </a:bodyPr>
+          <a:lstStyle/>
+          <a:p>
+            <a:pPr algn="l"/>
+            <a:r>
+              <a:rPr sz="1500" b="1" i="0">
+                <a:solidFill>
+                  <a:srgbClr val="1E2622"/>
+                </a:solidFill>
+                <a:latin typeface="Noto Sans KR"/>
+                <a:ea typeface="Noto Sans KR"/>
+                <a:cs typeface="Noto Sans KR"/>
+              </a:rPr>
+              <a:t>어린 나무가 베어지는 모습</a:t>
+            </a:r>
+          </a:p>
+        </p:txBody>
+      </p:sp>
+      <p:sp>
+        <p:nvSpPr>
+          <p:cNvPr id="22" name="TextBox 21"/>
+          <p:cNvSpPr txBox="1"/>
+          <p:nvPr/>
+        </p:nvSpPr>
+        <p:spPr>
+          <a:xfrm>
+            <a:off x="813816" y="5779007"/>
+            <a:ext cx="6949440" cy="228600"/>
+          </a:xfrm>
+          <a:prstGeom prst="rect">
+            <a:avLst/>
+          </a:prstGeom>
+          <a:noFill/>
+        </p:spPr>
+        <p:txBody>
+          <a:bodyPr wrap="square" lIns="0" rIns="0" tIns="0" bIns="0" anchor="t">
+            <a:spAutoFit/>
+          </a:bodyPr>
+          <a:lstStyle/>
+          <a:p>
+            <a:pPr algn="l"/>
+            <a:r>
+              <a:rPr sz="1100" b="0" i="0">
+                <a:solidFill>
+                  <a:srgbClr val="5D6660"/>
+                </a:solidFill>
+                <a:latin typeface="Noto Sans KR"/>
+                <a:ea typeface="Noto Sans KR"/>
+                <a:cs typeface="Noto Sans KR"/>
+              </a:rPr>
+              <a:t>출처: </a:t>
+            </a:r>
+          </a:p>
+        </p:txBody>
+      </p:sp>
+      <p:sp>
+        <p:nvSpPr>
+          <p:cNvPr id="23" name="Rounded Rectangle 22"/>
+          <p:cNvSpPr/>
+          <p:nvPr/>
+        </p:nvSpPr>
+        <p:spPr>
+          <a:xfrm>
+            <a:off x="8138160" y="1783080"/>
+            <a:ext cx="3566160" cy="3566160"/>
+          </a:xfrm>
+          <a:prstGeom prst="roundRect">
+            <a:avLst>
+              <a:gd name="adj" fmla="val 5000"/>
+            </a:avLst>
+          </a:prstGeom>
+          <a:solidFill>
+            <a:srgbClr val="FBF9F4"/>
+          </a:solidFill>
+          <a:ln w="9525">
+            <a:solidFill>
+              <a:srgbClr val="DDD6C8"/>
+            </a:solidFill>
+          </a:ln>
+          <a:effectLst/>
+        </p:spPr>
+        <p:style>
+          <a:lnRef idx="1">
+            <a:schemeClr val="accent1"/>
+          </a:lnRef>
+          <a:fillRef idx="3">
+            <a:schemeClr val="accent1"/>
+          </a:fillRef>
+          <a:effectRef idx="2">
+            <a:schemeClr val="accent1"/>
+          </a:effectRef>
+          <a:fontRef idx="minor">
+            <a:schemeClr val="lt1"/>
+          </a:fontRef>
+        </p:style>
+        <p:txBody>
+          <a:bodyPr rtlCol="0" anchor="ctr"/>
+          <a:lstStyle/>
+          <a:p>
+            <a:pPr algn="ctr"/>
+          </a:p>
+        </p:txBody>
+      </p:sp>
+      <p:sp>
+        <p:nvSpPr>
+          <p:cNvPr id="24" name="TextBox 23"/>
+          <p:cNvSpPr txBox="1"/>
+          <p:nvPr/>
+        </p:nvSpPr>
+        <p:spPr>
+          <a:xfrm>
+            <a:off x="8412480" y="2011680"/>
+            <a:ext cx="3017520" cy="3108960"/>
+          </a:xfrm>
+          <a:prstGeom prst="rect">
+            <a:avLst/>
+          </a:prstGeom>
+          <a:noFill/>
+        </p:spPr>
+        <p:txBody>
+          <a:bodyPr wrap="square" lIns="0" rIns="0" tIns="0" bIns="0" anchor="t">
+            <a:spAutoFit/>
+          </a:bodyPr>
+          <a:lstStyle/>
+          <a:p>
+            <a:pPr algn="l"/>
+            <a:r>
+              <a:rPr sz="1500" b="1" i="0">
+                <a:solidFill>
+                  <a:srgbClr val="A8461A"/>
+                </a:solidFill>
+                <a:latin typeface="Noto Sans KR"/>
+                <a:ea typeface="Noto Sans KR"/>
+                <a:cs typeface="Noto Sans KR"/>
+              </a:rPr>
+              <a:t>이 장면이 던지는 질문</a:t>
+            </a:r>
+          </a:p>
+          <a:p>
+            <a:pPr algn="l">
+              <a:spcBef>
+                <a:spcPts val="600"/>
+              </a:spcBef>
+            </a:pPr>
+            <a:r>
+              <a:rPr sz="1600" b="1" i="0">
+                <a:solidFill>
+                  <a:srgbClr val="1E2622"/>
+                </a:solidFill>
+                <a:latin typeface="Noto Sans KR"/>
+                <a:ea typeface="Noto Sans KR"/>
+                <a:cs typeface="Noto Sans KR"/>
+              </a:rPr>
+              <a:t>숲가꾸기·벌채 행위는 산불 발생과 관계가 있는가?</a:t>
+            </a:r>
+          </a:p>
+          <a:p>
+            <a:pPr algn="l">
+              <a:spcBef>
+                <a:spcPts val="600"/>
+              </a:spcBef>
+            </a:pPr>
+            <a:r>
+              <a:rPr sz="1300" b="0" i="0">
+                <a:solidFill>
+                  <a:srgbClr val="5D6660"/>
+                </a:solidFill>
+                <a:latin typeface="Noto Sans KR"/>
+                <a:ea typeface="Noto Sans KR"/>
+                <a:cs typeface="Noto Sans KR"/>
+              </a:rPr>
+              <a:t>다음 슬라이드에서 분석 결과로 확인합니다.</a:t>
+            </a:r>
+          </a:p>
+        </p:txBody>
+      </p:sp>
+    </p:spTree>
+  </p:cSld>
+  <p:clrMapOvr>
+    <a:masterClrMapping/>
+  </p:clrMapOvr>
+</p:sld>
+</file>
+
+<file path=ppt/slides/slide28.xml><?xml version="1.0" encoding="utf-8"?>
+<p:sld xmlns:a="http://schemas.openxmlformats.org/drawingml/2006/main" xmlns:p="http://schemas.openxmlformats.org/presentationml/2006/main" xmlns:r="http://schemas.openxmlformats.org/officeDocument/2006/relationships">
+  <p:cSld>
+    <p:bg>
+      <p:bgPr>
+        <a:solidFill>
+          <a:srgbClr val="F5F2EA"/>
+        </a:solidFill>
+      </p:bgPr>
+    </p:bg>
+    <p:spTree>
+      <p:nvGrpSpPr>
+        <p:cNvPr id="1" name=""/>
+        <p:cNvGrpSpPr/>
+        <p:nvPr/>
+      </p:nvGrpSpPr>
+      <p:grpSpPr/>
+      <p:sp>
+        <p:nvSpPr>
+          <p:cNvPr id="2" name="Text 0"/>
+          <p:cNvSpPr/>
+          <p:nvPr/>
+        </p:nvSpPr>
+        <p:spPr>
+          <a:xfrm>
+            <a:off x="812800" y="812800"/>
+            <a:ext cx="10883392" cy="256530"/>
+          </a:xfrm>
+          <a:prstGeom prst="rect">
+            <a:avLst/>
+          </a:prstGeom>
+          <a:noFill/>
+          <a:ln/>
+        </p:spPr>
+        <p:txBody>
+          <a:bodyPr wrap="square" lIns="0" tIns="0" rIns="0" bIns="0" rtlCol="0" anchor="t">
+            <a:normAutofit/>
+          </a:bodyPr>
+          <a:lstStyle/>
+          <a:p>
+            <a:pPr algn="l" indent="0" marL="0">
+              <a:lnSpc>
+                <a:spcPts val="1820"/>
+              </a:lnSpc>
+              <a:buNone/>
+            </a:pPr>
+            <a:r>
+              <a:rPr lang="en-US" sz="1300" b="1" spc="100" kern="0" dirty="0">
+                <a:solidFill>
+                  <a:srgbClr val="A8461A"/>
+                </a:solidFill>
+                <a:latin typeface="Noto Sans KR" pitchFamily="34" charset="0"/>
+                <a:ea typeface="Noto Sans KR" pitchFamily="34" charset="-122"/>
+                <a:cs typeface="Noto Sans KR" pitchFamily="34" charset="-120"/>
+              </a:rPr>
+              <a:t>현장 사진</a:t>
+            </a:r>
+            <a:endParaRPr lang="en-US" sz="1300" dirty="0"/>
+          </a:p>
+        </p:txBody>
+      </p:sp>
+      <p:sp>
+        <p:nvSpPr>
+          <p:cNvPr id="3" name="Text 1"/>
+          <p:cNvSpPr/>
+          <p:nvPr>
+            <p:ph type="title"/>
+          </p:nvPr>
+        </p:nvSpPr>
+        <p:spPr>
+          <a:xfrm>
+            <a:off x="812800" y="1145530"/>
+            <a:ext cx="10883392" cy="501650"/>
+          </a:xfrm>
+          <a:prstGeom prst="rect">
+            <a:avLst/>
+          </a:prstGeom>
+          <a:noFill/>
+          <a:ln/>
+        </p:spPr>
+        <p:txBody>
+          <a:bodyPr wrap="square" lIns="0" tIns="0" rIns="0" bIns="0" rtlCol="0" anchor="t">
+            <a:normAutofit/>
+          </a:bodyPr>
+          <a:lstStyle/>
+          <a:p>
+            <a:pPr algn="l" indent="0" marL="0">
+              <a:lnSpc>
+                <a:spcPts val="3750"/>
+              </a:lnSpc>
+              <a:buNone/>
+            </a:pPr>
+            <a:r>
+              <a:rPr lang="en-US" sz="3000" b="1" i="0" dirty="0">
+                <a:solidFill>
+                  <a:srgbClr val="1E2622"/>
+                </a:solidFill>
+                <a:latin typeface="Noto Serif KR" pitchFamily="18" charset="0"/>
+                <a:ea typeface="Noto Serif KR" pitchFamily="18" charset="-122"/>
+                <a:cs typeface="Noto Serif KR" pitchFamily="18" charset="-120"/>
+              </a:rPr>
+              <a:t>임도와 등산로</a:t>
+            </a:r>
+            <a:endParaRPr lang="en-US" sz="3000" dirty="0"/>
+          </a:p>
+        </p:txBody>
+      </p:sp>
+      <p:sp>
+        <p:nvSpPr>
+          <p:cNvPr id="17" name="Text 15"/>
+          <p:cNvSpPr/>
+          <p:nvPr/>
+        </p:nvSpPr>
+        <p:spPr>
+          <a:xfrm>
+            <a:off x="812800" y="6238280"/>
+            <a:ext cx="7848600" cy="238720"/>
+          </a:xfrm>
+          <a:prstGeom prst="rect">
+            <a:avLst/>
+          </a:prstGeom>
+          <a:noFill/>
+          <a:ln/>
+        </p:spPr>
+        <p:txBody>
+          <a:bodyPr wrap="square" lIns="0" tIns="0" rIns="0" bIns="0" rtlCol="0" anchor="t">
+            <a:normAutofit/>
+          </a:bodyPr>
+          <a:lstStyle/>
+          <a:p>
+            <a:pPr algn="l" indent="0" marL="0">
+              <a:lnSpc>
+                <a:spcPts val="1680"/>
+              </a:lnSpc>
+              <a:buNone/>
+            </a:pPr>
+            <a:r>
+              <a:rPr lang="en-US" sz="1200" dirty="0">
+                <a:solidFill>
+                  <a:srgbClr val="5D6660"/>
+                </a:solidFill>
+                <a:latin typeface="Noto Sans KR" pitchFamily="34" charset="0"/>
+                <a:ea typeface="Noto Sans KR" pitchFamily="34" charset="-122"/>
+                <a:cs typeface="Noto Sans KR" pitchFamily="34" charset="-120"/>
+              </a:rPr>
+              <a:t>Youn et al. (2026) · </a:t>
+            </a:r>
+            <a:r>
+              <a:rPr lang="en-US" sz="1200" i="1" dirty="0">
+                <a:solidFill>
+                  <a:srgbClr val="5D6660"/>
+                </a:solidFill>
+                <a:latin typeface="Noto Sans KR" pitchFamily="34" charset="0"/>
+                <a:ea typeface="Noto Sans KR" pitchFamily="34" charset="-122"/>
+                <a:cs typeface="Noto Sans KR" pitchFamily="34" charset="-120"/>
+              </a:rPr>
+              <a:t>Fire</a:t>
+            </a:r>
+            <a:r>
+              <a:rPr lang="en-US" sz="1200" dirty="0">
+                <a:solidFill>
+                  <a:srgbClr val="5D6660"/>
+                </a:solidFill>
+                <a:latin typeface="Noto Sans KR" pitchFamily="34" charset="0"/>
+                <a:ea typeface="Noto Sans KR" pitchFamily="34" charset="-122"/>
+                <a:cs typeface="Noto Sans KR" pitchFamily="34" charset="-120"/>
+              </a:rPr>
+              <a:t> 9(6): 246</a:t>
+            </a:r>
+            <a:endParaRPr lang="en-US" sz="1200" dirty="0"/>
+          </a:p>
+        </p:txBody>
+      </p:sp>
+      <p:sp>
+        <p:nvSpPr>
+          <p:cNvPr id="18" name="Text 16"/>
+          <p:cNvSpPr/>
+          <p:nvPr/>
+        </p:nvSpPr>
+        <p:spPr>
+          <a:xfrm>
+            <a:off x="10058400" y="6238280"/>
+            <a:ext cx="1320800" cy="238720"/>
+          </a:xfrm>
+          <a:prstGeom prst="rect">
+            <a:avLst/>
+          </a:prstGeom>
+          <a:noFill/>
+          <a:ln/>
+        </p:spPr>
+        <p:txBody>
+          <a:bodyPr wrap="square" lIns="0" tIns="0" rIns="0" bIns="0" rtlCol="0" anchor="t">
+            <a:normAutofit/>
+          </a:bodyPr>
+          <a:lstStyle/>
+          <a:p>
+            <a:pPr algn="r" indent="0" marL="0">
+              <a:lnSpc>
+                <a:spcPts val="1680"/>
+              </a:lnSpc>
+              <a:buNone/>
+            </a:pPr>
+            <a:r>
+              <a:rPr lang="en-US" sz="1200" dirty="0">
+                <a:solidFill>
+                  <a:srgbClr val="5D6660"/>
+                </a:solidFill>
+                <a:latin typeface="Noto Sans KR" pitchFamily="34" charset="0"/>
+                <a:ea typeface="Noto Sans KR" pitchFamily="34" charset="-122"/>
+                <a:cs typeface="Noto Sans KR" pitchFamily="34" charset="-120"/>
+              </a:rPr>
+              <a:t>21</a:t>
             </a:r>
             <a:endParaRPr lang="en-US" sz="1200" dirty="0"/>
           </a:p>
@@ -17134,7 +17665,7 @@
                 <a:ea typeface="Noto Sans KR" pitchFamily="34" charset="-122"/>
                 <a:cs typeface="Noto Sans KR" pitchFamily="34" charset="-120"/>
               </a:rPr>
-              <a:t>6</a:t>
+              <a:t>7</a:t>
             </a:r>
             <a:endParaRPr lang="en-US" sz="1200" dirty="0"/>
           </a:p>
@@ -17722,7 +18253,7 @@
                 <a:ea typeface="Noto Sans KR" pitchFamily="34" charset="-122"/>
                 <a:cs typeface="Noto Sans KR" pitchFamily="34" charset="-120"/>
               </a:rPr>
-              <a:t>7</a:t>
+              <a:t>8</a:t>
             </a:r>
             <a:endParaRPr lang="en-US" sz="1200" dirty="0"/>
           </a:p>
@@ -18572,7 +19103,7 @@
                 <a:ea typeface="Noto Sans KR" pitchFamily="34" charset="-122"/>
                 <a:cs typeface="Noto Sans KR" pitchFamily="34" charset="-120"/>
               </a:rPr>
-              <a:t>8</a:t>
+              <a:t>9</a:t>
             </a:r>
             <a:endParaRPr lang="en-US" sz="1200" dirty="0"/>
           </a:p>
@@ -20526,7 +21057,7 @@
                 <a:ea typeface="Noto Sans KR" pitchFamily="34" charset="-122"/>
                 <a:cs typeface="Noto Sans KR" pitchFamily="34" charset="-120"/>
               </a:rPr>
-              <a:t>9</a:t>
+              <a:t>10</a:t>
             </a:r>
             <a:endParaRPr lang="en-US" sz="1200" dirty="0"/>
           </a:p>
@@ -21851,7 +22382,7 @@
                 <a:ea typeface="Noto Sans KR" pitchFamily="34" charset="-122"/>
                 <a:cs typeface="Noto Sans KR" pitchFamily="34" charset="-120"/>
               </a:rPr>
-              <a:t>10</a:t>
+              <a:t>11</a:t>
             </a:r>
             <a:endParaRPr lang="en-US" sz="1200" dirty="0"/>
           </a:p>
@@ -22848,7 +23379,7 @@
                 <a:ea typeface="Noto Sans KR" pitchFamily="34" charset="-122"/>
                 <a:cs typeface="Noto Sans KR" pitchFamily="34" charset="-120"/>
               </a:rPr>
-              <a:t>11</a:t>
+              <a:t>12</a:t>
             </a:r>
             <a:endParaRPr lang="en-US" sz="1200" dirty="0"/>
           </a:p>
@@ -24287,7 +24818,7 @@
                 <a:ea typeface="Noto Sans KR" pitchFamily="34" charset="-122"/>
                 <a:cs typeface="Noto Sans KR" pitchFamily="34" charset="-120"/>
               </a:rPr>
-              <a:t>12</a:t>
+              <a:t>13</a:t>
             </a:r>
             <a:endParaRPr lang="en-US" sz="1200" dirty="0"/>
           </a:p>

--- a/산불논문_발표자료_수정본.pptx
+++ b/산불논문_발표자료_수정본.pptx
@@ -152,7 +152,7 @@
               <c:strCache>
                 <c:ptCount val="1"/>
                 <c:pt idx="0">
-                  <c:v>발생</c:v>
+                  <c:v>건수</c:v>
                 </c:pt>
               </c:strCache>
             </c:strRef>
@@ -164,35 +164,53 @@
           </c:spPr>
           <c:cat>
             <c:strRef>
-              <c:f>Sheet1!$A$2:$A$4</c:f>
+              <c:f>Sheet1!$A$2:$A$7</c:f>
               <c:strCache>
-                <c:ptCount val="3"/>
+                <c:ptCount val="6"/>
                 <c:pt idx="0">
-                  <c:v>경북</c:v>
+                  <c:v>70s</c:v>
                 </c:pt>
                 <c:pt idx="1">
-                  <c:v>영서</c:v>
+                  <c:v>80s</c:v>
                 </c:pt>
                 <c:pt idx="2">
-                  <c:v>영동</c:v>
+                  <c:v>90s</c:v>
+                </c:pt>
+                <c:pt idx="3">
+                  <c:v>00s</c:v>
+                </c:pt>
+                <c:pt idx="4">
+                  <c:v>10s</c:v>
+                </c:pt>
+                <c:pt idx="5">
+                  <c:v>20s*</c:v>
                 </c:pt>
               </c:strCache>
             </c:strRef>
           </c:cat>
           <c:val>
             <c:numRef>
-              <c:f>Sheet1!$B$2:$B$4</c:f>
+              <c:f>Sheet1!$B$2:$B$7</c:f>
               <c:numCache>
                 <c:formatCode>General</c:formatCode>
-                <c:ptCount val="3"/>
+                <c:ptCount val="6"/>
                 <c:pt idx="0">
-                  <c:v>266</c:v>
+                  <c:v>637</c:v>
                 </c:pt>
                 <c:pt idx="1">
-                  <c:v>139</c:v>
+                  <c:v>238</c:v>
                 </c:pt>
                 <c:pt idx="2">
-                  <c:v>66</c:v>
+                  <c:v>336</c:v>
+                </c:pt>
+                <c:pt idx="3">
+                  <c:v>523</c:v>
+                </c:pt>
+                <c:pt idx="4">
+                  <c:v>440</c:v>
+                </c:pt>
+                <c:pt idx="5">
+                  <c:v>510</c:v>
                 </c:pt>
               </c:numCache>
             </c:numRef>
@@ -205,7 +223,7 @@
             <a:lstStyle/>
             <a:p>
               <a:pPr>
-                <a:defRPr sz="1100">
+                <a:defRPr sz="1000">
                   <a:solidFill>
                     <a:srgbClr val="1E2622"/>
                   </a:solidFill>
@@ -248,7 +266,7 @@
           <a:lstStyle/>
           <a:p>
             <a:pPr>
-              <a:defRPr sz="1100"/>
+              <a:defRPr sz="1000"/>
             </a:pPr>
           </a:p>
         </c:txPr>
@@ -278,7 +296,7 @@
     <a:lstStyle/>
     <a:p>
       <a:pPr>
-        <a:defRPr sz="1100">
+        <a:defRPr sz="1000">
           <a:solidFill>
             <a:srgbClr val="5D6660"/>
           </a:solidFill>
@@ -323,105 +341,92 @@
             </a:solidFill>
           </c:spPr>
           <c:dPt>
-            <c:idx val="1"/>
+            <c:idx val="5"/>
             <c:spPr>
               <a:solidFill>
                 <a:srgbClr val="A8461A"/>
               </a:solidFill>
             </c:spPr>
           </c:dPt>
-          <c:dLbls>
-            <c:dLbl>
-              <c:idx val="0"/>
-              <c:tx>
-                <c:rich>
-                  <a:bodyPr/>
-                  <a:lstStyle/>
-                  <a:p>
-                    <a:r>
-                      <a:rPr sz="1000" b="1">
-                        <a:solidFill>
-                          <a:srgbClr val="1E2622"/>
-                        </a:solidFill>
-                      </a:rPr>
-                      <a:t>3,700~4,000</a:t>
-                    </a:r>
-                  </a:p>
-                </c:rich>
-              </c:tx>
-              <c:dLblPos val="outEnd"/>
-              <c:showLegendKey val="0"/>
-              <c:showVal val="1"/>
-              <c:showCatName val="0"/>
-              <c:showSerName val="0"/>
-              <c:showPercent val="0"/>
-              <c:showBubbleSize val="0"/>
-            </c:dLbl>
-            <c:dLbl>
-              <c:idx val="1"/>
-              <c:tx>
-                <c:rich>
-                  <a:bodyPr/>
-                  <a:lstStyle/>
-                  <a:p>
-                    <a:r>
-                      <a:rPr sz="1000" b="1">
-                        <a:solidFill>
-                          <a:srgbClr val="1E2622"/>
-                        </a:solidFill>
-                      </a:rPr>
-                      <a:t>약 104,000</a:t>
-                    </a:r>
-                  </a:p>
-                </c:rich>
-              </c:tx>
-              <c:dLblPos val="outEnd"/>
-              <c:showLegendKey val="0"/>
-              <c:showVal val="1"/>
-              <c:showCatName val="0"/>
-              <c:showSerName val="0"/>
-              <c:showPercent val="0"/>
-              <c:showBubbleSize val="0"/>
-            </c:dLbl>
-            <c:showLegendKey val="0"/>
-            <c:showVal val="0"/>
-            <c:showCatName val="0"/>
-            <c:showSerName val="0"/>
-            <c:showPercent val="0"/>
-            <c:showBubbleSize val="0"/>
-            <c:showLeaderLines val="1"/>
-          </c:dLbls>
           <c:cat>
             <c:strRef>
-              <c:f>Sheet1!$A$2:$A$3</c:f>
+              <c:f>Sheet1!$A$2:$A$7</c:f>
               <c:strCache>
-                <c:ptCount val="2"/>
+                <c:ptCount val="6"/>
                 <c:pt idx="0">
-                  <c:v>연평균</c:v>
+                  <c:v>70s</c:v>
                 </c:pt>
                 <c:pt idx="1">
-                  <c:v>2025년 3월</c:v>
+                  <c:v>80s</c:v>
+                </c:pt>
+                <c:pt idx="2">
+                  <c:v>90s</c:v>
+                </c:pt>
+                <c:pt idx="3">
+                  <c:v>00s</c:v>
+                </c:pt>
+                <c:pt idx="4">
+                  <c:v>10s</c:v>
+                </c:pt>
+                <c:pt idx="5">
+                  <c:v>20s*</c:v>
                 </c:pt>
               </c:strCache>
             </c:strRef>
           </c:cat>
           <c:val>
             <c:numRef>
-              <c:f>Sheet1!$B$2:$B$3</c:f>
+              <c:f>Sheet1!$B$2:$B$7</c:f>
               <c:numCache>
                 <c:formatCode>General</c:formatCode>
-                <c:ptCount val="2"/>
+                <c:ptCount val="6"/>
                 <c:pt idx="0">
-                  <c:v>3850</c:v>
+                  <c:v>3687</c:v>
                 </c:pt>
                 <c:pt idx="1">
-                  <c:v>104000</c:v>
+                  <c:v>1112</c:v>
+                </c:pt>
+                <c:pt idx="2">
+                  <c:v>1398</c:v>
+                </c:pt>
+                <c:pt idx="3">
+                  <c:v>3726</c:v>
+                </c:pt>
+                <c:pt idx="4">
+                  <c:v>857</c:v>
+                </c:pt>
+                <c:pt idx="5">
+                  <c:v>23118</c:v>
                 </c:pt>
               </c:numCache>
             </c:numRef>
           </c:val>
         </c:ser>
-        <c:gapWidth val="30"/>
+        <c:dLbls>
+          <c:numFmt formatCode="#,##0" sourceLinked="0"/>
+          <c:txPr>
+            <a:bodyPr/>
+            <a:lstStyle/>
+            <a:p>
+              <a:pPr>
+                <a:defRPr sz="1000">
+                  <a:solidFill>
+                    <a:srgbClr val="1E2622"/>
+                  </a:solidFill>
+                </a:defRPr>
+              </a:pPr>
+            </a:p>
+          </c:txPr>
+          <c:dLblPos val="outEnd"/>
+          <c:showLegendKey val="0"/>
+          <c:showVal val="1"/>
+          <c:showCatName val="0"/>
+          <c:showSerName val="0"/>
+          <c:showPercent val="0"/>
+          <c:showBubbleSize val="0"/>
+          <c:showLeaderLines val="1"/>
+        </c:dLbls>
+        <c:gapWidth val="50"/>
         <c:axId val="-2068027336"/>
         <c:axId val="-2113994440"/>
       </c:barChart>
@@ -447,7 +452,7 @@
           <a:lstStyle/>
           <a:p>
             <a:pPr>
-              <a:defRPr sz="1100"/>
+              <a:defRPr sz="1000"/>
             </a:pPr>
           </a:p>
         </c:txPr>
@@ -477,7 +482,7 @@
     <a:lstStyle/>
     <a:p>
       <a:pPr>
-        <a:defRPr sz="1100">
+        <a:defRPr sz="1000">
           <a:solidFill>
             <a:srgbClr val="5D6660"/>
           </a:solidFill>
@@ -2359,7 +2364,7 @@
           <a:lstStyle/>
           <a:p>
             <a:r>
-              <a:t>[약 1분 30초] 논문에 정리된 국내 산불 현황이다. 우리나라는 연평균 450~500건의 산불이 발생해 3,700~4,000ha가 소실된다. 그런데 2025년 3월 영남 대형산불 한 번의 피해면적이 약 10만 4천 ha로, 연평균 피해의 26배를 넘는다. 가운데 그림 오른쪽 막대가 그 차이다(연평균은 범위의 중간값으로 표시). 왼쪽은 이 연구의 대상인 강원·경북에서 2022년 1월~2025년 8월 사이 정리된 발생 격자 471건의 권역별 분포로, 경북이 266건으로 가장 많다. 오른쪽은 선행연구가 보고한 최근 경향이다: 1991~2020년 연간 산불이 늘고 있고, 대형산불은 강원·경북 북동부에 집중되며, 산불 시기는 봄에서 5월과 겨울로 넓어지고, 주말 등산이 늘면서 주말 산불이 늘었다. 농촌 인구의 감소와 고령화로 초동 진화도 어려워지고 있다. [출처: Youn et al. 2026, 서론 및 3.1절]</a:t>
+              <a:t>[약 1분 30초] 우리나라 산불 발생현황을 전반적으로 본다. 산림청 통계의 연대별 연평균이다. 왼쪽, 연간 발생 건수는 1970년대 637건에서 1980년대 238건으로 줄었다가 2000년대 523건, 2020년대 510건으로 다시 늘었다. 연 450~500건 안팎이 논문에서 말하는 평균적인 규모다. 가운데, 피해면적은 사정이 다르다. 2010년대는 연평균 857ha까지 줄었지만 2020년대는 23,118ha로 급증했다. 2022년 울진·삼척 산불과 2025년 3월 영남 대형산불 때문이다. 2025년 영남 산불 한 번의 피해가 논문 기준 약 10만 4천 ha, 전체 산림의 1.64%였다. 즉 건수가 아니라 대형화가 문제다. 오른쪽은 논문이 정리한 최근 경향이다. [확인 필요: 연대별 수치는 산림청 산불발생현황 원자료와 대조 후 사용]</a:t>
             </a:r>
           </a:p>
         </p:txBody>
@@ -13193,7 +13198,7 @@
                 <a:ea typeface="Noto Serif KR" pitchFamily="18" charset="-122"/>
                 <a:cs typeface="Noto Serif KR" pitchFamily="18" charset="-120"/>
               </a:rPr>
-              <a:t>우리나라 산불은 대형화·일상화되고 있다</a:t>
+              <a:t>우리나라 산불: 발생은 연 수백 건, 피해는 대형화</a:t>
             </a:r>
             <a:endParaRPr lang="en-US" sz="3000" dirty="0"/>
           </a:p>
@@ -13237,29 +13242,7 @@
                 <a:ea typeface="Noto Sans KR" pitchFamily="34" charset="-122"/>
                 <a:cs typeface="Noto Sans KR" pitchFamily="34" charset="-120"/>
               </a:rPr>
-              <a:t>Youn et al. (2026) · </a:t>
-            </a:r>
-            <a:r>
-              <a:rPr lang="en-US" sz="1200" i="1" dirty="0">
-                <a:solidFill>
-                  <a:srgbClr val="5D6660"/>
-                </a:solidFill>
-                <a:latin typeface="Noto Sans KR" pitchFamily="34" charset="0"/>
-                <a:ea typeface="Noto Sans KR" pitchFamily="34" charset="-122"/>
-                <a:cs typeface="Noto Sans KR" pitchFamily="34" charset="-120"/>
-              </a:rPr>
-              <a:t>Fire</a:t>
-            </a:r>
-            <a:r>
-              <a:rPr lang="en-US" sz="1200" dirty="0">
-                <a:solidFill>
-                  <a:srgbClr val="5D6660"/>
-                </a:solidFill>
-                <a:latin typeface="Noto Sans KR" pitchFamily="34" charset="0"/>
-                <a:ea typeface="Noto Sans KR" pitchFamily="34" charset="-122"/>
-                <a:cs typeface="Noto Sans KR" pitchFamily="34" charset="-120"/>
-              </a:rPr>
-              <a:t> 9(6): 246</a:t>
+              <a:t>자료: 산림청 산불발생현황 · 20s*는 2020–2025년 평균</a:t>
             </a:r>
             <a:endParaRPr lang="en-US" sz="1200" dirty="0"/>
           </a:p>
@@ -13485,7 +13468,7 @@
                 <a:ea typeface="Noto Sans KR"/>
                 <a:cs typeface="Noto Sans KR"/>
               </a:rPr>
-              <a:t>연구지역 산불 발생</a:t>
+              <a:t>연평균 발생 건수</a:t>
             </a:r>
           </a:p>
         </p:txBody>
@@ -13522,7 +13505,7 @@
                 <a:ea typeface="Noto Sans KR"/>
                 <a:cs typeface="Noto Sans KR"/>
               </a:rPr>
-              <a:t>강원·경북 · 2022.1–2025.8 · n = 471건</a:t>
+              <a:t>연대별, 건</a:t>
             </a:r>
           </a:p>
         </p:txBody>
@@ -13577,7 +13560,7 @@
                 <a:ea typeface="Noto Sans KR"/>
                 <a:cs typeface="Noto Sans KR"/>
               </a:rPr>
-              <a:t>피해면적 비교</a:t>
+              <a:t>연평균 피해면적</a:t>
             </a:r>
           </a:p>
         </p:txBody>
@@ -13614,7 +13597,7 @@
                 <a:ea typeface="Noto Sans KR"/>
                 <a:cs typeface="Noto Sans KR"/>
               </a:rPr>
-              <a:t>ha · 연평균은 범위의 중간값으로 표시</a:t>
+              <a:t>연대별, ha</a:t>
             </a:r>
           </a:p>
         </p:txBody>
@@ -13698,7 +13681,7 @@
           <a:p>
             <a:pPr algn="l"/>
             <a:r>
-              <a:rPr sz="1400" b="1" i="0">
+              <a:rPr sz="1300" b="1" i="0">
                 <a:solidFill>
                   <a:srgbClr val="A8461A"/>
                 </a:solidFill>
@@ -13706,7 +13689,7 @@
                 <a:ea typeface="Noto Sans KR"/>
                 <a:cs typeface="Noto Sans KR"/>
               </a:rPr>
-              <a:t>연 450~500건</a:t>
+              <a:t>2025년 3월 영남 대형산불</a:t>
             </a:r>
             <a:r>
               <a:rPr sz="1300" b="0" i="0">
@@ -13717,7 +13700,7 @@
                 <a:ea typeface="Noto Sans KR"/>
                 <a:cs typeface="Noto Sans KR"/>
               </a:rPr>
-              <a:t> 발생, 3,700~4,000 ha 소실</a:t>
+              <a:t> 약 10.4만 ha, 역대 최대 피해와 최다 인명피해</a:t>
             </a:r>
           </a:p>
           <a:p>
@@ -13830,7 +13813,7 @@
                 <a:ea typeface="Noto Sans KR"/>
                 <a:cs typeface="Noto Sans KR"/>
               </a:rPr>
-              <a:t>2025년 한 번의 대형산불이 </a:t>
+              <a:t>발생 건수는 연 수백 건 수준이지만, </a:t>
             </a:r>
             <a:r>
               <a:rPr sz="1600" b="1" i="0">
@@ -13841,7 +13824,7 @@
                 <a:ea typeface="Noto Sans KR"/>
                 <a:cs typeface="Noto Sans KR"/>
               </a:rPr>
-              <a:t>연평균 피해의 26배 이상</a:t>
+              <a:t>피해는 대형화</a:t>
             </a:r>
             <a:r>
               <a:rPr sz="1600" b="0" i="0">
@@ -13852,7 +13835,7 @@
                 <a:ea typeface="Noto Sans KR"/>
                 <a:cs typeface="Noto Sans KR"/>
               </a:rPr>
-              <a:t>을 남겼다.</a:t>
+              <a:t>되고 있다.</a:t>
             </a:r>
           </a:p>
         </p:txBody>
